--- a/pptx_sessions_8_22/第19回_基礎編_講師用.pptx
+++ b/pptx_sessions_8_22/第19回_基礎編_講師用.pptx
@@ -1531,7 +1531,9 @@
           </a:ln>
         </p:spPr>
         <p:txBody>
-          <a:bodyPr/>
+          <a:bodyPr wrap="square">
+            <a:normAutofit/>
+          </a:bodyPr>
           <a:p/>
         </p:txBody>
       </p:sp>
@@ -1560,7 +1562,9 @@
           </a:ln>
         </p:spPr>
         <p:txBody>
-          <a:bodyPr/>
+          <a:bodyPr wrap="square">
+            <a:normAutofit/>
+          </a:bodyPr>
           <a:p/>
         </p:txBody>
       </p:sp>
@@ -1582,7 +1586,9 @@
           <a:ln/>
         </p:spPr>
         <p:txBody>
-          <a:bodyPr wrap="square" rtlCol="0" anchor="ctr"/>
+          <a:bodyPr wrap="square" rtlCol="0" anchor="ctr">
+            <a:normAutofit/>
+          </a:bodyPr>
           <a:lstStyle/>
           <a:p>
             <a:pPr algn="ctr" indent="0" marL="0">
@@ -1621,7 +1627,9 @@
           <a:ln/>
         </p:spPr>
         <p:txBody>
-          <a:bodyPr wrap="square" rtlCol="0" anchor="ctr"/>
+          <a:bodyPr wrap="square" rtlCol="0" anchor="ctr">
+            <a:normAutofit/>
+          </a:bodyPr>
           <a:lstStyle/>
           <a:p>
             <a:pPr algn="ctr" indent="0" marL="0">
@@ -1660,7 +1668,9 @@
           <a:ln/>
         </p:spPr>
         <p:txBody>
-          <a:bodyPr wrap="square" rtlCol="0" anchor="ctr"/>
+          <a:bodyPr wrap="square" rtlCol="0" anchor="ctr">
+            <a:normAutofit/>
+          </a:bodyPr>
           <a:lstStyle/>
           <a:p>
             <a:pPr algn="ctr" indent="0" marL="0">
@@ -1699,7 +1709,9 @@
           <a:ln/>
         </p:spPr>
         <p:txBody>
-          <a:bodyPr wrap="square" rtlCol="0" anchor="ctr"/>
+          <a:bodyPr wrap="square" rtlCol="0" anchor="ctr">
+            <a:normAutofit/>
+          </a:bodyPr>
           <a:lstStyle/>
           <a:p>
             <a:pPr algn="ctr" indent="0" marL="0">
@@ -1747,7 +1759,9 @@
           </a:ln>
         </p:spPr>
         <p:txBody>
-          <a:bodyPr/>
+          <a:bodyPr wrap="square">
+            <a:normAutofit/>
+          </a:bodyPr>
           <a:p/>
         </p:txBody>
       </p:sp>
@@ -1769,7 +1783,9 @@
           <a:ln/>
         </p:spPr>
         <p:txBody>
-          <a:bodyPr wrap="square" rtlCol="0" anchor="ctr"/>
+          <a:bodyPr wrap="square" rtlCol="0" anchor="ctr">
+            <a:normAutofit/>
+          </a:bodyPr>
           <a:lstStyle/>
           <a:p>
             <a:pPr algn="ctr" indent="0" marL="0">
@@ -1840,7 +1856,9 @@
           </a:ln>
         </p:spPr>
         <p:txBody>
-          <a:bodyPr/>
+          <a:bodyPr wrap="square">
+            <a:normAutofit/>
+          </a:bodyPr>
           <a:p/>
         </p:txBody>
       </p:sp>
@@ -1869,7 +1887,9 @@
           </a:ln>
         </p:spPr>
         <p:txBody>
-          <a:bodyPr/>
+          <a:bodyPr wrap="square">
+            <a:normAutofit/>
+          </a:bodyPr>
           <a:p/>
         </p:txBody>
       </p:sp>
@@ -1891,7 +1911,9 @@
           <a:ln/>
         </p:spPr>
         <p:txBody>
-          <a:bodyPr wrap="square" rtlCol="0" anchor="ctr"/>
+          <a:bodyPr wrap="square" rtlCol="0" anchor="ctr">
+            <a:normAutofit/>
+          </a:bodyPr>
           <a:lstStyle/>
           <a:p>
             <a:pPr indent="0" marL="0">
@@ -1930,7 +1952,9 @@
           <a:ln/>
         </p:spPr>
         <p:txBody>
-          <a:bodyPr wrap="square" rtlCol="0" anchor="ctr"/>
+          <a:bodyPr wrap="square" rtlCol="0" anchor="ctr">
+            <a:normAutofit/>
+          </a:bodyPr>
           <a:lstStyle/>
           <a:p>
             <a:pPr indent="0" marL="0">
@@ -1978,7 +2002,9 @@
           </a:ln>
         </p:spPr>
         <p:txBody>
-          <a:bodyPr/>
+          <a:bodyPr wrap="square">
+            <a:normAutofit/>
+          </a:bodyPr>
           <a:p/>
         </p:txBody>
       </p:sp>
@@ -2000,7 +2026,9 @@
           <a:ln/>
         </p:spPr>
         <p:txBody>
-          <a:bodyPr wrap="square" rtlCol="0" anchor="ctr"/>
+          <a:bodyPr wrap="square" rtlCol="0" anchor="ctr">
+            <a:normAutofit/>
+          </a:bodyPr>
           <a:lstStyle/>
           <a:p>
             <a:pPr indent="0" marL="0">
@@ -2039,7 +2067,9 @@
           <a:ln/>
         </p:spPr>
         <p:txBody>
-          <a:bodyPr wrap="square" rtlCol="0" anchor="ctr"/>
+          <a:bodyPr wrap="square" rtlCol="0" anchor="ctr">
+            <a:normAutofit/>
+          </a:bodyPr>
           <a:lstStyle/>
           <a:p>
             <a:pPr indent="0" marL="0">
@@ -2078,7 +2108,9 @@
           <a:ln/>
         </p:spPr>
         <p:txBody>
-          <a:bodyPr wrap="square" rtlCol="0" anchor="ctr"/>
+          <a:bodyPr wrap="square" rtlCol="0" anchor="ctr">
+            <a:normAutofit/>
+          </a:bodyPr>
           <a:lstStyle/>
           <a:p>
             <a:pPr indent="0" marL="0">
@@ -2126,7 +2158,9 @@
           </a:ln>
         </p:spPr>
         <p:txBody>
-          <a:bodyPr/>
+          <a:bodyPr wrap="square">
+            <a:normAutofit/>
+          </a:bodyPr>
           <a:p/>
         </p:txBody>
       </p:sp>
@@ -2148,7 +2182,9 @@
           <a:ln/>
         </p:spPr>
         <p:txBody>
-          <a:bodyPr wrap="square" rtlCol="0" anchor="ctr"/>
+          <a:bodyPr wrap="square" rtlCol="0" anchor="ctr">
+            <a:normAutofit/>
+          </a:bodyPr>
           <a:lstStyle/>
           <a:p>
             <a:pPr indent="0" marL="0">
@@ -2187,7 +2223,9 @@
           <a:ln/>
         </p:spPr>
         <p:txBody>
-          <a:bodyPr wrap="square" rtlCol="0" anchor="ctr"/>
+          <a:bodyPr wrap="square" rtlCol="0" anchor="ctr">
+            <a:normAutofit/>
+          </a:bodyPr>
           <a:lstStyle/>
           <a:p>
             <a:pPr indent="0" marL="0">
@@ -2226,7 +2264,9 @@
           <a:ln/>
         </p:spPr>
         <p:txBody>
-          <a:bodyPr wrap="square" rtlCol="0" anchor="ctr"/>
+          <a:bodyPr wrap="square" rtlCol="0" anchor="ctr">
+            <a:normAutofit/>
+          </a:bodyPr>
           <a:lstStyle/>
           <a:p>
             <a:pPr indent="0" marL="0">
@@ -2274,7 +2314,9 @@
           </a:ln>
         </p:spPr>
         <p:txBody>
-          <a:bodyPr/>
+          <a:bodyPr wrap="square">
+            <a:normAutofit/>
+          </a:bodyPr>
           <a:p/>
         </p:txBody>
       </p:sp>
@@ -2296,7 +2338,9 @@
           <a:ln/>
         </p:spPr>
         <p:txBody>
-          <a:bodyPr wrap="square" rtlCol="0" anchor="ctr"/>
+          <a:bodyPr wrap="square" rtlCol="0" anchor="ctr">
+            <a:normAutofit/>
+          </a:bodyPr>
           <a:lstStyle/>
           <a:p>
             <a:pPr indent="0" marL="0">
@@ -2335,7 +2379,9 @@
           <a:ln/>
         </p:spPr>
         <p:txBody>
-          <a:bodyPr wrap="square" rtlCol="0" anchor="ctr"/>
+          <a:bodyPr wrap="square" rtlCol="0" anchor="ctr">
+            <a:normAutofit/>
+          </a:bodyPr>
           <a:lstStyle/>
           <a:p>
             <a:pPr indent="0" marL="0">
@@ -2374,7 +2420,9 @@
           <a:ln/>
         </p:spPr>
         <p:txBody>
-          <a:bodyPr wrap="square" rtlCol="0" anchor="ctr"/>
+          <a:bodyPr wrap="square" rtlCol="0" anchor="ctr">
+            <a:normAutofit/>
+          </a:bodyPr>
           <a:lstStyle/>
           <a:p>
             <a:pPr indent="0" marL="0">
@@ -2413,7 +2461,9 @@
           <a:ln/>
         </p:spPr>
         <p:txBody>
-          <a:bodyPr wrap="square" rtlCol="0" anchor="ctr"/>
+          <a:bodyPr wrap="square" rtlCol="0" anchor="ctr">
+            <a:normAutofit/>
+          </a:bodyPr>
           <a:lstStyle/>
           <a:p>
             <a:pPr algn="r" indent="0" marL="0">
@@ -2484,7 +2534,9 @@
           </a:ln>
         </p:spPr>
         <p:txBody>
-          <a:bodyPr/>
+          <a:bodyPr wrap="square">
+            <a:normAutofit/>
+          </a:bodyPr>
           <a:p/>
         </p:txBody>
       </p:sp>
@@ -2513,7 +2565,9 @@
           </a:ln>
         </p:spPr>
         <p:txBody>
-          <a:bodyPr/>
+          <a:bodyPr wrap="square">
+            <a:normAutofit/>
+          </a:bodyPr>
           <a:p/>
         </p:txBody>
       </p:sp>
@@ -2535,7 +2589,9 @@
           <a:ln/>
         </p:spPr>
         <p:txBody>
-          <a:bodyPr wrap="square" rtlCol="0" anchor="ctr"/>
+          <a:bodyPr wrap="square" rtlCol="0" anchor="ctr">
+            <a:normAutofit/>
+          </a:bodyPr>
           <a:lstStyle/>
           <a:p>
             <a:pPr indent="0" marL="0">
@@ -2574,7 +2630,9 @@
           <a:ln/>
         </p:spPr>
         <p:txBody>
-          <a:bodyPr wrap="square" rtlCol="0" anchor="ctr"/>
+          <a:bodyPr wrap="square" rtlCol="0" anchor="ctr">
+            <a:normAutofit/>
+          </a:bodyPr>
           <a:lstStyle/>
           <a:p>
             <a:pPr indent="0" marL="0">
@@ -2620,7 +2678,9 @@
           </a:ln>
         </p:spPr>
         <p:txBody>
-          <a:bodyPr/>
+          <a:bodyPr wrap="square">
+            <a:normAutofit/>
+          </a:bodyPr>
           <a:p/>
         </p:txBody>
       </p:sp>
@@ -2651,7 +2711,9 @@
           </a:ln>
         </p:spPr>
         <p:txBody>
-          <a:bodyPr/>
+          <a:bodyPr wrap="square">
+            <a:normAutofit/>
+          </a:bodyPr>
           <a:p/>
         </p:txBody>
       </p:sp>
@@ -2673,7 +2735,9 @@
           <a:ln/>
         </p:spPr>
         <p:txBody>
-          <a:bodyPr wrap="square" rtlCol="0" anchor="ctr"/>
+          <a:bodyPr wrap="square" rtlCol="0" anchor="ctr">
+            <a:normAutofit/>
+          </a:bodyPr>
           <a:lstStyle/>
           <a:p>
             <a:pPr algn="ctr" indent="0" marL="0">
@@ -2712,7 +2776,9 @@
           <a:ln/>
         </p:spPr>
         <p:txBody>
-          <a:bodyPr wrap="square" rtlCol="0" anchor="ctr"/>
+          <a:bodyPr wrap="square" rtlCol="0" anchor="ctr">
+            <a:normAutofit/>
+          </a:bodyPr>
           <a:lstStyle/>
           <a:p>
             <a:pPr indent="0" marL="0">
@@ -2758,7 +2824,9 @@
           </a:ln>
         </p:spPr>
         <p:txBody>
-          <a:bodyPr/>
+          <a:bodyPr wrap="square">
+            <a:normAutofit/>
+          </a:bodyPr>
           <a:p/>
         </p:txBody>
       </p:sp>
@@ -2789,7 +2857,9 @@
           </a:ln>
         </p:spPr>
         <p:txBody>
-          <a:bodyPr/>
+          <a:bodyPr wrap="square">
+            <a:normAutofit/>
+          </a:bodyPr>
           <a:p/>
         </p:txBody>
       </p:sp>
@@ -2811,7 +2881,9 @@
           <a:ln/>
         </p:spPr>
         <p:txBody>
-          <a:bodyPr wrap="square" rtlCol="0" anchor="ctr"/>
+          <a:bodyPr wrap="square" rtlCol="0" anchor="ctr">
+            <a:normAutofit/>
+          </a:bodyPr>
           <a:lstStyle/>
           <a:p>
             <a:pPr algn="ctr" indent="0" marL="0">
@@ -2850,7 +2922,9 @@
           <a:ln/>
         </p:spPr>
         <p:txBody>
-          <a:bodyPr wrap="square" rtlCol="0" anchor="ctr"/>
+          <a:bodyPr wrap="square" rtlCol="0" anchor="ctr">
+            <a:normAutofit/>
+          </a:bodyPr>
           <a:lstStyle/>
           <a:p>
             <a:pPr indent="0" marL="0">
@@ -2889,7 +2963,9 @@
           <a:ln/>
         </p:spPr>
         <p:txBody>
-          <a:bodyPr wrap="square" rtlCol="0" anchor="ctr"/>
+          <a:bodyPr wrap="square" rtlCol="0" anchor="ctr">
+            <a:normAutofit/>
+          </a:bodyPr>
           <a:lstStyle/>
           <a:p>
             <a:pPr indent="0" marL="0">
@@ -2937,7 +3013,9 @@
           </a:ln>
         </p:spPr>
         <p:txBody>
-          <a:bodyPr/>
+          <a:bodyPr wrap="square">
+            <a:normAutofit/>
+          </a:bodyPr>
           <a:p/>
         </p:txBody>
       </p:sp>
@@ -2968,7 +3046,9 @@
           </a:ln>
         </p:spPr>
         <p:txBody>
-          <a:bodyPr/>
+          <a:bodyPr wrap="square">
+            <a:normAutofit/>
+          </a:bodyPr>
           <a:p/>
         </p:txBody>
       </p:sp>
@@ -2990,7 +3070,9 @@
           <a:ln/>
         </p:spPr>
         <p:txBody>
-          <a:bodyPr wrap="square" rtlCol="0" anchor="ctr"/>
+          <a:bodyPr wrap="square" rtlCol="0" anchor="ctr">
+            <a:normAutofit/>
+          </a:bodyPr>
           <a:lstStyle/>
           <a:p>
             <a:pPr algn="ctr" indent="0" marL="0">
@@ -3029,7 +3111,9 @@
           <a:ln/>
         </p:spPr>
         <p:txBody>
-          <a:bodyPr wrap="square" rtlCol="0" anchor="ctr"/>
+          <a:bodyPr wrap="square" rtlCol="0" anchor="ctr">
+            <a:normAutofit/>
+          </a:bodyPr>
           <a:lstStyle/>
           <a:p>
             <a:pPr indent="0" marL="0">
@@ -3077,7 +3161,9 @@
           </a:ln>
         </p:spPr>
         <p:txBody>
-          <a:bodyPr/>
+          <a:bodyPr wrap="square">
+            <a:normAutofit/>
+          </a:bodyPr>
           <a:p/>
         </p:txBody>
       </p:sp>
@@ -3108,7 +3194,9 @@
           </a:ln>
         </p:spPr>
         <p:txBody>
-          <a:bodyPr/>
+          <a:bodyPr wrap="square">
+            <a:normAutofit/>
+          </a:bodyPr>
           <a:p/>
         </p:txBody>
       </p:sp>
@@ -3130,7 +3218,9 @@
           <a:ln/>
         </p:spPr>
         <p:txBody>
-          <a:bodyPr wrap="square" rtlCol="0" anchor="ctr"/>
+          <a:bodyPr wrap="square" rtlCol="0" anchor="ctr">
+            <a:normAutofit/>
+          </a:bodyPr>
           <a:lstStyle/>
           <a:p>
             <a:pPr algn="ctr" indent="0" marL="0">
@@ -3169,7 +3259,9 @@
           <a:ln/>
         </p:spPr>
         <p:txBody>
-          <a:bodyPr wrap="square" rtlCol="0" anchor="ctr"/>
+          <a:bodyPr wrap="square" rtlCol="0" anchor="ctr">
+            <a:normAutofit/>
+          </a:bodyPr>
           <a:lstStyle/>
           <a:p>
             <a:pPr indent="0" marL="0">
@@ -3217,7 +3309,9 @@
           </a:ln>
         </p:spPr>
         <p:txBody>
-          <a:bodyPr/>
+          <a:bodyPr wrap="square">
+            <a:normAutofit/>
+          </a:bodyPr>
           <a:p/>
         </p:txBody>
       </p:sp>
@@ -3248,7 +3342,9 @@
           </a:ln>
         </p:spPr>
         <p:txBody>
-          <a:bodyPr/>
+          <a:bodyPr wrap="square">
+            <a:normAutofit/>
+          </a:bodyPr>
           <a:p/>
         </p:txBody>
       </p:sp>
@@ -3270,7 +3366,9 @@
           <a:ln/>
         </p:spPr>
         <p:txBody>
-          <a:bodyPr wrap="square" rtlCol="0" anchor="ctr"/>
+          <a:bodyPr wrap="square" rtlCol="0" anchor="ctr">
+            <a:normAutofit/>
+          </a:bodyPr>
           <a:lstStyle/>
           <a:p>
             <a:pPr algn="ctr" indent="0" marL="0">
@@ -3309,7 +3407,9 @@
           <a:ln/>
         </p:spPr>
         <p:txBody>
-          <a:bodyPr wrap="square" rtlCol="0" anchor="ctr"/>
+          <a:bodyPr wrap="square" rtlCol="0" anchor="ctr">
+            <a:normAutofit/>
+          </a:bodyPr>
           <a:lstStyle/>
           <a:p>
             <a:pPr indent="0" marL="0">
@@ -3357,7 +3457,9 @@
           </a:ln>
         </p:spPr>
         <p:txBody>
-          <a:bodyPr/>
+          <a:bodyPr wrap="square">
+            <a:normAutofit/>
+          </a:bodyPr>
           <a:p/>
         </p:txBody>
       </p:sp>
@@ -3388,7 +3490,9 @@
           </a:ln>
         </p:spPr>
         <p:txBody>
-          <a:bodyPr/>
+          <a:bodyPr wrap="square">
+            <a:normAutofit/>
+          </a:bodyPr>
           <a:p/>
         </p:txBody>
       </p:sp>
@@ -3410,7 +3514,9 @@
           <a:ln/>
         </p:spPr>
         <p:txBody>
-          <a:bodyPr wrap="square" rtlCol="0" anchor="ctr"/>
+          <a:bodyPr wrap="square" rtlCol="0" anchor="ctr">
+            <a:normAutofit/>
+          </a:bodyPr>
           <a:lstStyle/>
           <a:p>
             <a:pPr algn="ctr" indent="0" marL="0">
@@ -3449,7 +3555,9 @@
           <a:ln/>
         </p:spPr>
         <p:txBody>
-          <a:bodyPr wrap="square" rtlCol="0" anchor="ctr"/>
+          <a:bodyPr wrap="square" rtlCol="0" anchor="ctr">
+            <a:normAutofit/>
+          </a:bodyPr>
           <a:lstStyle/>
           <a:p>
             <a:pPr indent="0" marL="0">
@@ -3497,7 +3605,9 @@
           </a:ln>
         </p:spPr>
         <p:txBody>
-          <a:bodyPr/>
+          <a:bodyPr wrap="square">
+            <a:normAutofit/>
+          </a:bodyPr>
           <a:p/>
         </p:txBody>
       </p:sp>
@@ -3528,7 +3638,9 @@
           </a:ln>
         </p:spPr>
         <p:txBody>
-          <a:bodyPr/>
+          <a:bodyPr wrap="square">
+            <a:normAutofit/>
+          </a:bodyPr>
           <a:p/>
         </p:txBody>
       </p:sp>
@@ -3550,7 +3662,9 @@
           <a:ln/>
         </p:spPr>
         <p:txBody>
-          <a:bodyPr wrap="square" rtlCol="0" anchor="ctr"/>
+          <a:bodyPr wrap="square" rtlCol="0" anchor="ctr">
+            <a:normAutofit/>
+          </a:bodyPr>
           <a:lstStyle/>
           <a:p>
             <a:pPr algn="ctr" indent="0" marL="0">
@@ -3589,7 +3703,9 @@
           <a:ln/>
         </p:spPr>
         <p:txBody>
-          <a:bodyPr wrap="square" rtlCol="0" anchor="ctr"/>
+          <a:bodyPr wrap="square" rtlCol="0" anchor="ctr">
+            <a:normAutofit/>
+          </a:bodyPr>
           <a:lstStyle/>
           <a:p>
             <a:pPr indent="0" marL="0">
@@ -3628,7 +3744,9 @@
           <a:ln/>
         </p:spPr>
         <p:txBody>
-          <a:bodyPr wrap="square" rtlCol="0" anchor="ctr"/>
+          <a:bodyPr wrap="square" rtlCol="0" anchor="ctr">
+            <a:normAutofit/>
+          </a:bodyPr>
           <a:lstStyle/>
           <a:p>
             <a:pPr algn="r" indent="0" marL="0">
@@ -3699,7 +3817,9 @@
           </a:ln>
         </p:spPr>
         <p:txBody>
-          <a:bodyPr/>
+          <a:bodyPr wrap="square">
+            <a:normAutofit/>
+          </a:bodyPr>
           <a:p/>
         </p:txBody>
       </p:sp>
@@ -3728,7 +3848,9 @@
           </a:ln>
         </p:spPr>
         <p:txBody>
-          <a:bodyPr/>
+          <a:bodyPr wrap="square">
+            <a:normAutofit/>
+          </a:bodyPr>
           <a:p/>
         </p:txBody>
       </p:sp>
@@ -3759,7 +3881,9 @@
           </a:ln>
         </p:spPr>
         <p:txBody>
-          <a:bodyPr/>
+          <a:bodyPr wrap="square">
+            <a:normAutofit/>
+          </a:bodyPr>
           <a:p/>
         </p:txBody>
       </p:sp>
@@ -3781,7 +3905,9 @@
           <a:ln/>
         </p:spPr>
         <p:txBody>
-          <a:bodyPr wrap="square" rtlCol="0" anchor="ctr"/>
+          <a:bodyPr wrap="square" rtlCol="0" anchor="ctr">
+            <a:normAutofit/>
+          </a:bodyPr>
           <a:lstStyle/>
           <a:p>
             <a:pPr algn="ctr" indent="0" marL="0">
@@ -3820,7 +3946,9 @@
           <a:ln/>
         </p:spPr>
         <p:txBody>
-          <a:bodyPr wrap="square" rtlCol="0" anchor="ctr"/>
+          <a:bodyPr wrap="square" rtlCol="0" anchor="ctr">
+            <a:normAutofit/>
+          </a:bodyPr>
           <a:lstStyle/>
           <a:p>
             <a:pPr indent="0" marL="0">
@@ -3859,7 +3987,9 @@
           <a:ln/>
         </p:spPr>
         <p:txBody>
-          <a:bodyPr wrap="square" rtlCol="0" anchor="ctr"/>
+          <a:bodyPr wrap="square" rtlCol="0" anchor="ctr">
+            <a:normAutofit/>
+          </a:bodyPr>
           <a:lstStyle/>
           <a:p>
             <a:pPr indent="0" marL="0">
@@ -3907,7 +4037,9 @@
           </a:ln>
         </p:spPr>
         <p:txBody>
-          <a:bodyPr/>
+          <a:bodyPr wrap="square">
+            <a:normAutofit/>
+          </a:bodyPr>
           <a:p/>
         </p:txBody>
       </p:sp>
@@ -3929,7 +4061,9 @@
           <a:ln/>
         </p:spPr>
         <p:txBody>
-          <a:bodyPr wrap="square" rtlCol="0" anchor="ctr"/>
+          <a:bodyPr wrap="square" rtlCol="0" anchor="ctr">
+            <a:normAutofit/>
+          </a:bodyPr>
           <a:lstStyle/>
           <a:p>
             <a:pPr indent="0" marL="0">
@@ -3968,7 +4102,9 @@
           <a:ln/>
         </p:spPr>
         <p:txBody>
-          <a:bodyPr wrap="square" rtlCol="0" anchor="t"/>
+          <a:bodyPr wrap="square" rtlCol="0" anchor="t">
+            <a:normAutofit/>
+          </a:bodyPr>
           <a:lstStyle/>
           <a:p>
             <a:pPr indent="0" marL="0">
@@ -4177,7 +4313,9 @@
           <a:ln/>
         </p:spPr>
         <p:txBody>
-          <a:bodyPr wrap="square" rtlCol="0" anchor="ctr"/>
+          <a:bodyPr wrap="square" rtlCol="0" anchor="ctr">
+            <a:normAutofit/>
+          </a:bodyPr>
           <a:lstStyle/>
           <a:p>
             <a:pPr algn="r" indent="0" marL="0">
@@ -4248,7 +4386,9 @@
           </a:ln>
         </p:spPr>
         <p:txBody>
-          <a:bodyPr/>
+          <a:bodyPr wrap="square">
+            <a:normAutofit/>
+          </a:bodyPr>
           <a:p/>
         </p:txBody>
       </p:sp>
@@ -4277,7 +4417,9 @@
           </a:ln>
         </p:spPr>
         <p:txBody>
-          <a:bodyPr/>
+          <a:bodyPr wrap="square">
+            <a:normAutofit/>
+          </a:bodyPr>
           <a:p/>
         </p:txBody>
       </p:sp>
@@ -4308,7 +4450,9 @@
           </a:ln>
         </p:spPr>
         <p:txBody>
-          <a:bodyPr/>
+          <a:bodyPr wrap="square">
+            <a:normAutofit/>
+          </a:bodyPr>
           <a:p/>
         </p:txBody>
       </p:sp>
@@ -4330,7 +4474,9 @@
           <a:ln/>
         </p:spPr>
         <p:txBody>
-          <a:bodyPr wrap="square" rtlCol="0" anchor="ctr"/>
+          <a:bodyPr wrap="square" rtlCol="0" anchor="ctr">
+            <a:normAutofit/>
+          </a:bodyPr>
           <a:lstStyle/>
           <a:p>
             <a:pPr algn="ctr" indent="0" marL="0">
@@ -4369,7 +4515,9 @@
           <a:ln/>
         </p:spPr>
         <p:txBody>
-          <a:bodyPr wrap="square" rtlCol="0" anchor="ctr"/>
+          <a:bodyPr wrap="square" rtlCol="0" anchor="ctr">
+            <a:normAutofit/>
+          </a:bodyPr>
           <a:lstStyle/>
           <a:p>
             <a:pPr indent="0" marL="0">
@@ -4408,7 +4556,9 @@
           <a:ln/>
         </p:spPr>
         <p:txBody>
-          <a:bodyPr wrap="square" rtlCol="0" anchor="ctr"/>
+          <a:bodyPr wrap="square" rtlCol="0" anchor="ctr">
+            <a:normAutofit/>
+          </a:bodyPr>
           <a:lstStyle/>
           <a:p>
             <a:pPr indent="0" marL="0">
@@ -4456,7 +4606,9 @@
           </a:ln>
         </p:spPr>
         <p:txBody>
-          <a:bodyPr/>
+          <a:bodyPr wrap="square">
+            <a:normAutofit/>
+          </a:bodyPr>
           <a:p/>
         </p:txBody>
       </p:sp>
@@ -4478,7 +4630,9 @@
           <a:ln/>
         </p:spPr>
         <p:txBody>
-          <a:bodyPr wrap="square" rtlCol="0" anchor="ctr"/>
+          <a:bodyPr wrap="square" rtlCol="0" anchor="ctr">
+            <a:normAutofit/>
+          </a:bodyPr>
           <a:lstStyle/>
           <a:p>
             <a:pPr indent="0" marL="0">
@@ -4517,7 +4671,9 @@
           <a:ln/>
         </p:spPr>
         <p:txBody>
-          <a:bodyPr wrap="square" rtlCol="0" anchor="ctr"/>
+          <a:bodyPr wrap="square" rtlCol="0" anchor="ctr">
+            <a:normAutofit/>
+          </a:bodyPr>
           <a:lstStyle/>
           <a:p>
             <a:pPr indent="0" marL="0">
@@ -4556,7 +4712,9 @@
           <a:ln/>
         </p:spPr>
         <p:txBody>
-          <a:bodyPr wrap="square" rtlCol="0" anchor="t"/>
+          <a:bodyPr wrap="square" rtlCol="0" anchor="t">
+            <a:normAutofit/>
+          </a:bodyPr>
           <a:lstStyle/>
           <a:p>
             <a:pPr indent="0" marL="0">
@@ -4595,7 +4753,9 @@
           <a:ln/>
         </p:spPr>
         <p:txBody>
-          <a:bodyPr wrap="square" rtlCol="0" anchor="ctr"/>
+          <a:bodyPr wrap="square" rtlCol="0" anchor="ctr">
+            <a:normAutofit/>
+          </a:bodyPr>
           <a:lstStyle/>
           <a:p>
             <a:pPr indent="0" marL="0">
@@ -4634,7 +4794,9 @@
           <a:ln/>
         </p:spPr>
         <p:txBody>
-          <a:bodyPr wrap="square" rtlCol="0" anchor="t"/>
+          <a:bodyPr wrap="square" rtlCol="0" anchor="t">
+            <a:normAutofit/>
+          </a:bodyPr>
           <a:lstStyle/>
           <a:p>
             <a:pPr indent="0" marL="0">
@@ -4673,7 +4835,9 @@
           <a:ln/>
         </p:spPr>
         <p:txBody>
-          <a:bodyPr wrap="square" rtlCol="0" anchor="ctr"/>
+          <a:bodyPr wrap="square" rtlCol="0" anchor="ctr">
+            <a:normAutofit/>
+          </a:bodyPr>
           <a:lstStyle/>
           <a:p>
             <a:pPr indent="0" marL="0">
@@ -4712,7 +4876,9 @@
           <a:ln/>
         </p:spPr>
         <p:txBody>
-          <a:bodyPr wrap="square" rtlCol="0" anchor="t"/>
+          <a:bodyPr wrap="square" rtlCol="0" anchor="t">
+            <a:normAutofit/>
+          </a:bodyPr>
           <a:lstStyle/>
           <a:p>
             <a:pPr indent="0" marL="0">
@@ -4760,7 +4926,9 @@
           </a:ln>
         </p:spPr>
         <p:txBody>
-          <a:bodyPr/>
+          <a:bodyPr wrap="square">
+            <a:normAutofit/>
+          </a:bodyPr>
           <a:p/>
         </p:txBody>
       </p:sp>
@@ -4782,7 +4950,9 @@
           <a:ln/>
         </p:spPr>
         <p:txBody>
-          <a:bodyPr wrap="square" rtlCol="0" anchor="ctr"/>
+          <a:bodyPr wrap="square" rtlCol="0" anchor="ctr">
+            <a:normAutofit/>
+          </a:bodyPr>
           <a:lstStyle/>
           <a:p>
             <a:pPr indent="0" marL="0">
@@ -4821,7 +4991,9 @@
           <a:ln/>
         </p:spPr>
         <p:txBody>
-          <a:bodyPr wrap="square" rtlCol="0" anchor="t"/>
+          <a:bodyPr wrap="square" rtlCol="0" anchor="t">
+            <a:normAutofit/>
+          </a:bodyPr>
           <a:lstStyle/>
           <a:p>
             <a:pPr indent="0" marL="0">
@@ -4860,7 +5032,9 @@
           <a:ln/>
         </p:spPr>
         <p:txBody>
-          <a:bodyPr wrap="square" rtlCol="0" anchor="t"/>
+          <a:bodyPr wrap="square" rtlCol="0" anchor="t">
+            <a:normAutofit/>
+          </a:bodyPr>
           <a:lstStyle/>
           <a:p>
             <a:pPr indent="0" marL="0">
@@ -4899,7 +5073,9 @@
           <a:ln/>
         </p:spPr>
         <p:txBody>
-          <a:bodyPr wrap="square" rtlCol="0" anchor="t"/>
+          <a:bodyPr wrap="square" rtlCol="0" anchor="t">
+            <a:normAutofit/>
+          </a:bodyPr>
           <a:lstStyle/>
           <a:p>
             <a:pPr indent="0" marL="0">
@@ -4938,7 +5114,9 @@
           <a:ln/>
         </p:spPr>
         <p:txBody>
-          <a:bodyPr wrap="square" rtlCol="0" anchor="ctr"/>
+          <a:bodyPr wrap="square" rtlCol="0" anchor="ctr">
+            <a:normAutofit/>
+          </a:bodyPr>
           <a:lstStyle/>
           <a:p>
             <a:pPr algn="r" indent="0" marL="0">
@@ -5009,7 +5187,9 @@
           </a:ln>
         </p:spPr>
         <p:txBody>
-          <a:bodyPr/>
+          <a:bodyPr wrap="square">
+            <a:normAutofit/>
+          </a:bodyPr>
           <a:p/>
         </p:txBody>
       </p:sp>
@@ -5038,7 +5218,9 @@
           </a:ln>
         </p:spPr>
         <p:txBody>
-          <a:bodyPr/>
+          <a:bodyPr wrap="square">
+            <a:normAutofit/>
+          </a:bodyPr>
           <a:p/>
         </p:txBody>
       </p:sp>
@@ -5069,7 +5251,9 @@
           </a:ln>
         </p:spPr>
         <p:txBody>
-          <a:bodyPr/>
+          <a:bodyPr wrap="square">
+            <a:normAutofit/>
+          </a:bodyPr>
           <a:p/>
         </p:txBody>
       </p:sp>
@@ -5091,7 +5275,9 @@
           <a:ln/>
         </p:spPr>
         <p:txBody>
-          <a:bodyPr wrap="square" rtlCol="0" anchor="ctr"/>
+          <a:bodyPr wrap="square" rtlCol="0" anchor="ctr">
+            <a:normAutofit/>
+          </a:bodyPr>
           <a:lstStyle/>
           <a:p>
             <a:pPr algn="ctr" indent="0" marL="0">
@@ -5130,7 +5316,9 @@
           <a:ln/>
         </p:spPr>
         <p:txBody>
-          <a:bodyPr wrap="square" rtlCol="0" anchor="ctr"/>
+          <a:bodyPr wrap="square" rtlCol="0" anchor="ctr">
+            <a:normAutofit/>
+          </a:bodyPr>
           <a:lstStyle/>
           <a:p>
             <a:pPr indent="0" marL="0">
@@ -5169,7 +5357,9 @@
           <a:ln/>
         </p:spPr>
         <p:txBody>
-          <a:bodyPr wrap="square" rtlCol="0" anchor="ctr"/>
+          <a:bodyPr wrap="square" rtlCol="0" anchor="ctr">
+            <a:normAutofit/>
+          </a:bodyPr>
           <a:lstStyle/>
           <a:p>
             <a:pPr indent="0" marL="0">
@@ -5217,7 +5407,9 @@
           </a:ln>
         </p:spPr>
         <p:txBody>
-          <a:bodyPr/>
+          <a:bodyPr wrap="square">
+            <a:normAutofit/>
+          </a:bodyPr>
           <a:p/>
         </p:txBody>
       </p:sp>
@@ -5239,7 +5431,9 @@
           <a:ln/>
         </p:spPr>
         <p:txBody>
-          <a:bodyPr wrap="square" rtlCol="0" anchor="ctr"/>
+          <a:bodyPr wrap="square" rtlCol="0" anchor="ctr">
+            <a:normAutofit/>
+          </a:bodyPr>
           <a:lstStyle/>
           <a:p>
             <a:pPr indent="0" marL="0">
@@ -5278,7 +5472,9 @@
           <a:ln/>
         </p:spPr>
         <p:txBody>
-          <a:bodyPr wrap="square" rtlCol="0" anchor="t"/>
+          <a:bodyPr wrap="square" rtlCol="0" anchor="t">
+            <a:normAutofit/>
+          </a:bodyPr>
           <a:lstStyle/>
           <a:p>
             <a:pPr indent="0" marL="0">
@@ -5640,7 +5836,9 @@
           <a:ln/>
         </p:spPr>
         <p:txBody>
-          <a:bodyPr wrap="square" rtlCol="0" anchor="ctr"/>
+          <a:bodyPr wrap="square" rtlCol="0" anchor="ctr">
+            <a:normAutofit/>
+          </a:bodyPr>
           <a:lstStyle/>
           <a:p>
             <a:pPr algn="r" indent="0" marL="0">
@@ -5711,7 +5909,9 @@
           </a:ln>
         </p:spPr>
         <p:txBody>
-          <a:bodyPr/>
+          <a:bodyPr wrap="square">
+            <a:normAutofit/>
+          </a:bodyPr>
           <a:p/>
         </p:txBody>
       </p:sp>
@@ -5740,7 +5940,9 @@
           </a:ln>
         </p:spPr>
         <p:txBody>
-          <a:bodyPr/>
+          <a:bodyPr wrap="square">
+            <a:normAutofit/>
+          </a:bodyPr>
           <a:p/>
         </p:txBody>
       </p:sp>
@@ -5771,7 +5973,9 @@
           </a:ln>
         </p:spPr>
         <p:txBody>
-          <a:bodyPr/>
+          <a:bodyPr wrap="square">
+            <a:normAutofit/>
+          </a:bodyPr>
           <a:p/>
         </p:txBody>
       </p:sp>
@@ -5793,7 +5997,9 @@
           <a:ln/>
         </p:spPr>
         <p:txBody>
-          <a:bodyPr wrap="square" rtlCol="0" anchor="ctr"/>
+          <a:bodyPr wrap="square" rtlCol="0" anchor="ctr">
+            <a:normAutofit/>
+          </a:bodyPr>
           <a:lstStyle/>
           <a:p>
             <a:pPr algn="ctr" indent="0" marL="0">
@@ -5832,7 +6038,9 @@
           <a:ln/>
         </p:spPr>
         <p:txBody>
-          <a:bodyPr wrap="square" rtlCol="0" anchor="ctr"/>
+          <a:bodyPr wrap="square" rtlCol="0" anchor="ctr">
+            <a:normAutofit/>
+          </a:bodyPr>
           <a:lstStyle/>
           <a:p>
             <a:pPr indent="0" marL="0">
@@ -5871,7 +6079,9 @@
           <a:ln/>
         </p:spPr>
         <p:txBody>
-          <a:bodyPr wrap="square" rtlCol="0" anchor="ctr"/>
+          <a:bodyPr wrap="square" rtlCol="0" anchor="ctr">
+            <a:normAutofit/>
+          </a:bodyPr>
           <a:lstStyle/>
           <a:p>
             <a:pPr indent="0" marL="0">
@@ -5919,7 +6129,9 @@
           </a:ln>
         </p:spPr>
         <p:txBody>
-          <a:bodyPr/>
+          <a:bodyPr wrap="square">
+            <a:normAutofit/>
+          </a:bodyPr>
           <a:p/>
         </p:txBody>
       </p:sp>
@@ -5941,7 +6153,9 @@
           <a:ln/>
         </p:spPr>
         <p:txBody>
-          <a:bodyPr wrap="square" rtlCol="0" anchor="ctr"/>
+          <a:bodyPr wrap="square" rtlCol="0" anchor="ctr">
+            <a:normAutofit/>
+          </a:bodyPr>
           <a:lstStyle/>
           <a:p>
             <a:pPr indent="0" marL="0">
@@ -5980,7 +6194,9 @@
           <a:ln/>
         </p:spPr>
         <p:txBody>
-          <a:bodyPr wrap="square" rtlCol="0" anchor="ctr"/>
+          <a:bodyPr wrap="square" rtlCol="0" anchor="ctr">
+            <a:normAutofit/>
+          </a:bodyPr>
           <a:lstStyle/>
           <a:p>
             <a:pPr indent="0" marL="0">
@@ -6019,7 +6235,9 @@
           <a:ln/>
         </p:spPr>
         <p:txBody>
-          <a:bodyPr wrap="square" rtlCol="0" anchor="t"/>
+          <a:bodyPr wrap="square" rtlCol="0" anchor="t">
+            <a:normAutofit/>
+          </a:bodyPr>
           <a:lstStyle/>
           <a:p>
             <a:pPr indent="0" marL="0">
@@ -6058,7 +6276,9 @@
           <a:ln/>
         </p:spPr>
         <p:txBody>
-          <a:bodyPr wrap="square" rtlCol="0" anchor="ctr"/>
+          <a:bodyPr wrap="square" rtlCol="0" anchor="ctr">
+            <a:normAutofit/>
+          </a:bodyPr>
           <a:lstStyle/>
           <a:p>
             <a:pPr indent="0" marL="0">
@@ -6097,7 +6317,9 @@
           <a:ln/>
         </p:spPr>
         <p:txBody>
-          <a:bodyPr wrap="square" rtlCol="0" anchor="t"/>
+          <a:bodyPr wrap="square" rtlCol="0" anchor="t">
+            <a:normAutofit/>
+          </a:bodyPr>
           <a:lstStyle/>
           <a:p>
             <a:pPr indent="0" marL="0">
@@ -6136,7 +6358,9 @@
           <a:ln/>
         </p:spPr>
         <p:txBody>
-          <a:bodyPr wrap="square" rtlCol="0" anchor="ctr"/>
+          <a:bodyPr wrap="square" rtlCol="0" anchor="ctr">
+            <a:normAutofit/>
+          </a:bodyPr>
           <a:lstStyle/>
           <a:p>
             <a:pPr indent="0" marL="0">
@@ -6175,7 +6399,9 @@
           <a:ln/>
         </p:spPr>
         <p:txBody>
-          <a:bodyPr wrap="square" rtlCol="0" anchor="t"/>
+          <a:bodyPr wrap="square" rtlCol="0" anchor="t">
+            <a:normAutofit/>
+          </a:bodyPr>
           <a:lstStyle/>
           <a:p>
             <a:pPr indent="0" marL="0">
@@ -6223,7 +6449,9 @@
           </a:ln>
         </p:spPr>
         <p:txBody>
-          <a:bodyPr/>
+          <a:bodyPr wrap="square">
+            <a:normAutofit/>
+          </a:bodyPr>
           <a:p/>
         </p:txBody>
       </p:sp>
@@ -6245,7 +6473,9 @@
           <a:ln/>
         </p:spPr>
         <p:txBody>
-          <a:bodyPr wrap="square" rtlCol="0" anchor="ctr"/>
+          <a:bodyPr wrap="square" rtlCol="0" anchor="ctr">
+            <a:normAutofit/>
+          </a:bodyPr>
           <a:lstStyle/>
           <a:p>
             <a:pPr indent="0" marL="0">
@@ -6284,7 +6514,9 @@
           <a:ln/>
         </p:spPr>
         <p:txBody>
-          <a:bodyPr wrap="square" rtlCol="0" anchor="t"/>
+          <a:bodyPr wrap="square" rtlCol="0" anchor="t">
+            <a:normAutofit/>
+          </a:bodyPr>
           <a:lstStyle/>
           <a:p>
             <a:pPr indent="0" marL="0">
@@ -6323,7 +6555,9 @@
           <a:ln/>
         </p:spPr>
         <p:txBody>
-          <a:bodyPr wrap="square" rtlCol="0" anchor="t"/>
+          <a:bodyPr wrap="square" rtlCol="0" anchor="t">
+            <a:normAutofit/>
+          </a:bodyPr>
           <a:lstStyle/>
           <a:p>
             <a:pPr indent="0" marL="0">
@@ -6362,7 +6596,9 @@
           <a:ln/>
         </p:spPr>
         <p:txBody>
-          <a:bodyPr wrap="square" rtlCol="0" anchor="t"/>
+          <a:bodyPr wrap="square" rtlCol="0" anchor="t">
+            <a:normAutofit/>
+          </a:bodyPr>
           <a:lstStyle/>
           <a:p>
             <a:pPr indent="0" marL="0">
@@ -6401,7 +6637,9 @@
           <a:ln/>
         </p:spPr>
         <p:txBody>
-          <a:bodyPr wrap="square" rtlCol="0" anchor="ctr"/>
+          <a:bodyPr wrap="square" rtlCol="0" anchor="ctr">
+            <a:normAutofit/>
+          </a:bodyPr>
           <a:lstStyle/>
           <a:p>
             <a:pPr algn="r" indent="0" marL="0">
@@ -6472,7 +6710,9 @@
           </a:ln>
         </p:spPr>
         <p:txBody>
-          <a:bodyPr/>
+          <a:bodyPr wrap="square">
+            <a:normAutofit/>
+          </a:bodyPr>
           <a:p/>
         </p:txBody>
       </p:sp>
@@ -6501,7 +6741,9 @@
           </a:ln>
         </p:spPr>
         <p:txBody>
-          <a:bodyPr/>
+          <a:bodyPr wrap="square">
+            <a:normAutofit/>
+          </a:bodyPr>
           <a:p/>
         </p:txBody>
       </p:sp>
@@ -6532,7 +6774,9 @@
           </a:ln>
         </p:spPr>
         <p:txBody>
-          <a:bodyPr/>
+          <a:bodyPr wrap="square">
+            <a:normAutofit/>
+          </a:bodyPr>
           <a:p/>
         </p:txBody>
       </p:sp>
@@ -6554,7 +6798,9 @@
           <a:ln/>
         </p:spPr>
         <p:txBody>
-          <a:bodyPr wrap="square" rtlCol="0" anchor="ctr"/>
+          <a:bodyPr wrap="square" rtlCol="0" anchor="ctr">
+            <a:normAutofit/>
+          </a:bodyPr>
           <a:lstStyle/>
           <a:p>
             <a:pPr algn="ctr" indent="0" marL="0">
@@ -6593,7 +6839,9 @@
           <a:ln/>
         </p:spPr>
         <p:txBody>
-          <a:bodyPr wrap="square" rtlCol="0" anchor="ctr"/>
+          <a:bodyPr wrap="square" rtlCol="0" anchor="ctr">
+            <a:normAutofit/>
+          </a:bodyPr>
           <a:lstStyle/>
           <a:p>
             <a:pPr indent="0" marL="0">
@@ -6632,7 +6880,9 @@
           <a:ln/>
         </p:spPr>
         <p:txBody>
-          <a:bodyPr wrap="square" rtlCol="0" anchor="ctr"/>
+          <a:bodyPr wrap="square" rtlCol="0" anchor="ctr">
+            <a:normAutofit/>
+          </a:bodyPr>
           <a:lstStyle/>
           <a:p>
             <a:pPr indent="0" marL="0">
@@ -6680,7 +6930,9 @@
           </a:ln>
         </p:spPr>
         <p:txBody>
-          <a:bodyPr/>
+          <a:bodyPr wrap="square">
+            <a:normAutofit/>
+          </a:bodyPr>
           <a:p/>
         </p:txBody>
       </p:sp>
@@ -6702,7 +6954,9 @@
           <a:ln/>
         </p:spPr>
         <p:txBody>
-          <a:bodyPr wrap="square" rtlCol="0" anchor="ctr"/>
+          <a:bodyPr wrap="square" rtlCol="0" anchor="ctr">
+            <a:normAutofit/>
+          </a:bodyPr>
           <a:lstStyle/>
           <a:p>
             <a:pPr indent="0" marL="0">
@@ -6741,7 +6995,9 @@
           <a:ln/>
         </p:spPr>
         <p:txBody>
-          <a:bodyPr wrap="square" rtlCol="0" anchor="ctr"/>
+          <a:bodyPr wrap="square" rtlCol="0" anchor="ctr">
+            <a:normAutofit/>
+          </a:bodyPr>
           <a:lstStyle/>
           <a:p>
             <a:pPr indent="0" marL="0">
@@ -6780,7 +7036,9 @@
           <a:ln/>
         </p:spPr>
         <p:txBody>
-          <a:bodyPr wrap="square" rtlCol="0" anchor="t"/>
+          <a:bodyPr wrap="square" rtlCol="0" anchor="t">
+            <a:normAutofit/>
+          </a:bodyPr>
           <a:lstStyle/>
           <a:p>
             <a:pPr indent="0" marL="0">
@@ -6819,7 +7077,9 @@
           <a:ln/>
         </p:spPr>
         <p:txBody>
-          <a:bodyPr wrap="square" rtlCol="0" anchor="ctr"/>
+          <a:bodyPr wrap="square" rtlCol="0" anchor="ctr">
+            <a:normAutofit/>
+          </a:bodyPr>
           <a:lstStyle/>
           <a:p>
             <a:pPr indent="0" marL="0">
@@ -6858,7 +7118,9 @@
           <a:ln/>
         </p:spPr>
         <p:txBody>
-          <a:bodyPr wrap="square" rtlCol="0" anchor="t"/>
+          <a:bodyPr wrap="square" rtlCol="0" anchor="t">
+            <a:normAutofit/>
+          </a:bodyPr>
           <a:lstStyle/>
           <a:p>
             <a:pPr indent="0" marL="0">
@@ -6897,7 +7159,9 @@
           <a:ln/>
         </p:spPr>
         <p:txBody>
-          <a:bodyPr wrap="square" rtlCol="0" anchor="ctr"/>
+          <a:bodyPr wrap="square" rtlCol="0" anchor="ctr">
+            <a:normAutofit/>
+          </a:bodyPr>
           <a:lstStyle/>
           <a:p>
             <a:pPr indent="0" marL="0">
@@ -6936,7 +7200,9 @@
           <a:ln/>
         </p:spPr>
         <p:txBody>
-          <a:bodyPr wrap="square" rtlCol="0" anchor="t"/>
+          <a:bodyPr wrap="square" rtlCol="0" anchor="t">
+            <a:normAutofit/>
+          </a:bodyPr>
           <a:lstStyle/>
           <a:p>
             <a:pPr indent="0" marL="0">
@@ -6984,7 +7250,9 @@
           </a:ln>
         </p:spPr>
         <p:txBody>
-          <a:bodyPr/>
+          <a:bodyPr wrap="square">
+            <a:normAutofit/>
+          </a:bodyPr>
           <a:p/>
         </p:txBody>
       </p:sp>
@@ -7006,7 +7274,9 @@
           <a:ln/>
         </p:spPr>
         <p:txBody>
-          <a:bodyPr wrap="square" rtlCol="0" anchor="ctr"/>
+          <a:bodyPr wrap="square" rtlCol="0" anchor="ctr">
+            <a:normAutofit/>
+          </a:bodyPr>
           <a:lstStyle/>
           <a:p>
             <a:pPr indent="0" marL="0">
@@ -7045,7 +7315,9 @@
           <a:ln/>
         </p:spPr>
         <p:txBody>
-          <a:bodyPr wrap="square" rtlCol="0" anchor="t"/>
+          <a:bodyPr wrap="square" rtlCol="0" anchor="t">
+            <a:normAutofit/>
+          </a:bodyPr>
           <a:lstStyle/>
           <a:p>
             <a:pPr indent="0" marL="0">
@@ -7084,7 +7356,9 @@
           <a:ln/>
         </p:spPr>
         <p:txBody>
-          <a:bodyPr wrap="square" rtlCol="0" anchor="t"/>
+          <a:bodyPr wrap="square" rtlCol="0" anchor="t">
+            <a:normAutofit/>
+          </a:bodyPr>
           <a:lstStyle/>
           <a:p>
             <a:pPr indent="0" marL="0">
@@ -7123,7 +7397,9 @@
           <a:ln/>
         </p:spPr>
         <p:txBody>
-          <a:bodyPr wrap="square" rtlCol="0" anchor="t"/>
+          <a:bodyPr wrap="square" rtlCol="0" anchor="t">
+            <a:normAutofit/>
+          </a:bodyPr>
           <a:lstStyle/>
           <a:p>
             <a:pPr indent="0" marL="0">
@@ -7162,7 +7438,9 @@
           <a:ln/>
         </p:spPr>
         <p:txBody>
-          <a:bodyPr wrap="square" rtlCol="0" anchor="ctr"/>
+          <a:bodyPr wrap="square" rtlCol="0" anchor="ctr">
+            <a:normAutofit/>
+          </a:bodyPr>
           <a:lstStyle/>
           <a:p>
             <a:pPr algn="r" indent="0" marL="0">

--- a/pptx_sessions_8_22/第19回_基礎編_講師用.pptx
+++ b/pptx_sessions_8_22/第19回_基礎編_講師用.pptx
@@ -1531,9 +1531,7 @@
           </a:ln>
         </p:spPr>
         <p:txBody>
-          <a:bodyPr wrap="square">
-            <a:normAutofit/>
-          </a:bodyPr>
+          <a:bodyPr/>
           <a:p/>
         </p:txBody>
       </p:sp>
@@ -1562,9 +1560,7 @@
           </a:ln>
         </p:spPr>
         <p:txBody>
-          <a:bodyPr wrap="square">
-            <a:normAutofit/>
-          </a:bodyPr>
+          <a:bodyPr/>
           <a:p/>
         </p:txBody>
       </p:sp>
@@ -1586,9 +1582,7 @@
           <a:ln/>
         </p:spPr>
         <p:txBody>
-          <a:bodyPr wrap="square" rtlCol="0" anchor="ctr">
-            <a:normAutofit/>
-          </a:bodyPr>
+          <a:bodyPr wrap="square" rtlCol="0" anchor="ctr"/>
           <a:lstStyle/>
           <a:p>
             <a:pPr algn="ctr" indent="0" marL="0">
@@ -1627,9 +1621,7 @@
           <a:ln/>
         </p:spPr>
         <p:txBody>
-          <a:bodyPr wrap="square" rtlCol="0" anchor="ctr">
-            <a:normAutofit/>
-          </a:bodyPr>
+          <a:bodyPr wrap="square" rtlCol="0" anchor="ctr"/>
           <a:lstStyle/>
           <a:p>
             <a:pPr algn="ctr" indent="0" marL="0">
@@ -1668,9 +1660,7 @@
           <a:ln/>
         </p:spPr>
         <p:txBody>
-          <a:bodyPr wrap="square" rtlCol="0" anchor="ctr">
-            <a:normAutofit/>
-          </a:bodyPr>
+          <a:bodyPr wrap="square" rtlCol="0" anchor="ctr"/>
           <a:lstStyle/>
           <a:p>
             <a:pPr algn="ctr" indent="0" marL="0">
@@ -1709,9 +1699,7 @@
           <a:ln/>
         </p:spPr>
         <p:txBody>
-          <a:bodyPr wrap="square" rtlCol="0" anchor="ctr">
-            <a:normAutofit/>
-          </a:bodyPr>
+          <a:bodyPr wrap="square" rtlCol="0" anchor="ctr"/>
           <a:lstStyle/>
           <a:p>
             <a:pPr algn="ctr" indent="0" marL="0">
@@ -1759,9 +1747,7 @@
           </a:ln>
         </p:spPr>
         <p:txBody>
-          <a:bodyPr wrap="square">
-            <a:normAutofit/>
-          </a:bodyPr>
+          <a:bodyPr/>
           <a:p/>
         </p:txBody>
       </p:sp>
@@ -1783,9 +1769,7 @@
           <a:ln/>
         </p:spPr>
         <p:txBody>
-          <a:bodyPr wrap="square" rtlCol="0" anchor="ctr">
-            <a:normAutofit/>
-          </a:bodyPr>
+          <a:bodyPr wrap="square" rtlCol="0" anchor="ctr"/>
           <a:lstStyle/>
           <a:p>
             <a:pPr algn="ctr" indent="0" marL="0">
@@ -1856,9 +1840,7 @@
           </a:ln>
         </p:spPr>
         <p:txBody>
-          <a:bodyPr wrap="square">
-            <a:normAutofit/>
-          </a:bodyPr>
+          <a:bodyPr/>
           <a:p/>
         </p:txBody>
       </p:sp>
@@ -1887,9 +1869,7 @@
           </a:ln>
         </p:spPr>
         <p:txBody>
-          <a:bodyPr wrap="square">
-            <a:normAutofit/>
-          </a:bodyPr>
+          <a:bodyPr/>
           <a:p/>
         </p:txBody>
       </p:sp>
@@ -1911,9 +1891,7 @@
           <a:ln/>
         </p:spPr>
         <p:txBody>
-          <a:bodyPr wrap="square" rtlCol="0" anchor="ctr">
-            <a:normAutofit/>
-          </a:bodyPr>
+          <a:bodyPr wrap="square" rtlCol="0" anchor="ctr"/>
           <a:lstStyle/>
           <a:p>
             <a:pPr indent="0" marL="0">
@@ -1952,9 +1930,7 @@
           <a:ln/>
         </p:spPr>
         <p:txBody>
-          <a:bodyPr wrap="square" rtlCol="0" anchor="ctr">
-            <a:normAutofit/>
-          </a:bodyPr>
+          <a:bodyPr wrap="square" rtlCol="0" anchor="ctr"/>
           <a:lstStyle/>
           <a:p>
             <a:pPr indent="0" marL="0">
@@ -2002,9 +1978,7 @@
           </a:ln>
         </p:spPr>
         <p:txBody>
-          <a:bodyPr wrap="square">
-            <a:normAutofit/>
-          </a:bodyPr>
+          <a:bodyPr/>
           <a:p/>
         </p:txBody>
       </p:sp>
@@ -2026,9 +2000,7 @@
           <a:ln/>
         </p:spPr>
         <p:txBody>
-          <a:bodyPr wrap="square" rtlCol="0" anchor="ctr">
-            <a:normAutofit/>
-          </a:bodyPr>
+          <a:bodyPr wrap="square" rtlCol="0" anchor="ctr"/>
           <a:lstStyle/>
           <a:p>
             <a:pPr indent="0" marL="0">
@@ -2067,9 +2039,7 @@
           <a:ln/>
         </p:spPr>
         <p:txBody>
-          <a:bodyPr wrap="square" rtlCol="0" anchor="ctr">
-            <a:normAutofit/>
-          </a:bodyPr>
+          <a:bodyPr wrap="square" rtlCol="0" anchor="ctr"/>
           <a:lstStyle/>
           <a:p>
             <a:pPr indent="0" marL="0">
@@ -2108,9 +2078,7 @@
           <a:ln/>
         </p:spPr>
         <p:txBody>
-          <a:bodyPr wrap="square" rtlCol="0" anchor="ctr">
-            <a:normAutofit/>
-          </a:bodyPr>
+          <a:bodyPr wrap="square" rtlCol="0" anchor="ctr"/>
           <a:lstStyle/>
           <a:p>
             <a:pPr indent="0" marL="0">
@@ -2158,9 +2126,7 @@
           </a:ln>
         </p:spPr>
         <p:txBody>
-          <a:bodyPr wrap="square">
-            <a:normAutofit/>
-          </a:bodyPr>
+          <a:bodyPr/>
           <a:p/>
         </p:txBody>
       </p:sp>
@@ -2182,9 +2148,7 @@
           <a:ln/>
         </p:spPr>
         <p:txBody>
-          <a:bodyPr wrap="square" rtlCol="0" anchor="ctr">
-            <a:normAutofit/>
-          </a:bodyPr>
+          <a:bodyPr wrap="square" rtlCol="0" anchor="ctr"/>
           <a:lstStyle/>
           <a:p>
             <a:pPr indent="0" marL="0">
@@ -2223,9 +2187,7 @@
           <a:ln/>
         </p:spPr>
         <p:txBody>
-          <a:bodyPr wrap="square" rtlCol="0" anchor="ctr">
-            <a:normAutofit/>
-          </a:bodyPr>
+          <a:bodyPr wrap="square" rtlCol="0" anchor="ctr"/>
           <a:lstStyle/>
           <a:p>
             <a:pPr indent="0" marL="0">
@@ -2264,9 +2226,7 @@
           <a:ln/>
         </p:spPr>
         <p:txBody>
-          <a:bodyPr wrap="square" rtlCol="0" anchor="ctr">
-            <a:normAutofit/>
-          </a:bodyPr>
+          <a:bodyPr wrap="square" rtlCol="0" anchor="ctr"/>
           <a:lstStyle/>
           <a:p>
             <a:pPr indent="0" marL="0">
@@ -2314,9 +2274,7 @@
           </a:ln>
         </p:spPr>
         <p:txBody>
-          <a:bodyPr wrap="square">
-            <a:normAutofit/>
-          </a:bodyPr>
+          <a:bodyPr/>
           <a:p/>
         </p:txBody>
       </p:sp>
@@ -2338,9 +2296,7 @@
           <a:ln/>
         </p:spPr>
         <p:txBody>
-          <a:bodyPr wrap="square" rtlCol="0" anchor="ctr">
-            <a:normAutofit/>
-          </a:bodyPr>
+          <a:bodyPr wrap="square" rtlCol="0" anchor="ctr"/>
           <a:lstStyle/>
           <a:p>
             <a:pPr indent="0" marL="0">
@@ -2379,9 +2335,7 @@
           <a:ln/>
         </p:spPr>
         <p:txBody>
-          <a:bodyPr wrap="square" rtlCol="0" anchor="ctr">
-            <a:normAutofit/>
-          </a:bodyPr>
+          <a:bodyPr wrap="square" rtlCol="0" anchor="ctr"/>
           <a:lstStyle/>
           <a:p>
             <a:pPr indent="0" marL="0">
@@ -2420,9 +2374,7 @@
           <a:ln/>
         </p:spPr>
         <p:txBody>
-          <a:bodyPr wrap="square" rtlCol="0" anchor="ctr">
-            <a:normAutofit/>
-          </a:bodyPr>
+          <a:bodyPr wrap="square" rtlCol="0" anchor="ctr"/>
           <a:lstStyle/>
           <a:p>
             <a:pPr indent="0" marL="0">
@@ -2461,9 +2413,7 @@
           <a:ln/>
         </p:spPr>
         <p:txBody>
-          <a:bodyPr wrap="square" rtlCol="0" anchor="ctr">
-            <a:normAutofit/>
-          </a:bodyPr>
+          <a:bodyPr wrap="square" rtlCol="0" anchor="ctr"/>
           <a:lstStyle/>
           <a:p>
             <a:pPr algn="r" indent="0" marL="0">
@@ -2534,9 +2484,7 @@
           </a:ln>
         </p:spPr>
         <p:txBody>
-          <a:bodyPr wrap="square">
-            <a:normAutofit/>
-          </a:bodyPr>
+          <a:bodyPr/>
           <a:p/>
         </p:txBody>
       </p:sp>
@@ -2565,9 +2513,7 @@
           </a:ln>
         </p:spPr>
         <p:txBody>
-          <a:bodyPr wrap="square">
-            <a:normAutofit/>
-          </a:bodyPr>
+          <a:bodyPr/>
           <a:p/>
         </p:txBody>
       </p:sp>
@@ -2589,9 +2535,7 @@
           <a:ln/>
         </p:spPr>
         <p:txBody>
-          <a:bodyPr wrap="square" rtlCol="0" anchor="ctr">
-            <a:normAutofit/>
-          </a:bodyPr>
+          <a:bodyPr wrap="square" rtlCol="0" anchor="ctr"/>
           <a:lstStyle/>
           <a:p>
             <a:pPr indent="0" marL="0">
@@ -2630,9 +2574,7 @@
           <a:ln/>
         </p:spPr>
         <p:txBody>
-          <a:bodyPr wrap="square" rtlCol="0" anchor="ctr">
-            <a:normAutofit/>
-          </a:bodyPr>
+          <a:bodyPr wrap="square" rtlCol="0" anchor="ctr"/>
           <a:lstStyle/>
           <a:p>
             <a:pPr indent="0" marL="0">
@@ -2678,9 +2620,7 @@
           </a:ln>
         </p:spPr>
         <p:txBody>
-          <a:bodyPr wrap="square">
-            <a:normAutofit/>
-          </a:bodyPr>
+          <a:bodyPr/>
           <a:p/>
         </p:txBody>
       </p:sp>
@@ -2711,9 +2651,7 @@
           </a:ln>
         </p:spPr>
         <p:txBody>
-          <a:bodyPr wrap="square">
-            <a:normAutofit/>
-          </a:bodyPr>
+          <a:bodyPr/>
           <a:p/>
         </p:txBody>
       </p:sp>
@@ -2735,9 +2673,7 @@
           <a:ln/>
         </p:spPr>
         <p:txBody>
-          <a:bodyPr wrap="square" rtlCol="0" anchor="ctr">
-            <a:normAutofit/>
-          </a:bodyPr>
+          <a:bodyPr wrap="square" rtlCol="0" anchor="ctr"/>
           <a:lstStyle/>
           <a:p>
             <a:pPr algn="ctr" indent="0" marL="0">
@@ -2776,9 +2712,7 @@
           <a:ln/>
         </p:spPr>
         <p:txBody>
-          <a:bodyPr wrap="square" rtlCol="0" anchor="ctr">
-            <a:normAutofit/>
-          </a:bodyPr>
+          <a:bodyPr wrap="square" rtlCol="0" anchor="ctr"/>
           <a:lstStyle/>
           <a:p>
             <a:pPr indent="0" marL="0">
@@ -2824,9 +2758,7 @@
           </a:ln>
         </p:spPr>
         <p:txBody>
-          <a:bodyPr wrap="square">
-            <a:normAutofit/>
-          </a:bodyPr>
+          <a:bodyPr/>
           <a:p/>
         </p:txBody>
       </p:sp>
@@ -2857,9 +2789,7 @@
           </a:ln>
         </p:spPr>
         <p:txBody>
-          <a:bodyPr wrap="square">
-            <a:normAutofit/>
-          </a:bodyPr>
+          <a:bodyPr/>
           <a:p/>
         </p:txBody>
       </p:sp>
@@ -2881,9 +2811,7 @@
           <a:ln/>
         </p:spPr>
         <p:txBody>
-          <a:bodyPr wrap="square" rtlCol="0" anchor="ctr">
-            <a:normAutofit/>
-          </a:bodyPr>
+          <a:bodyPr wrap="square" rtlCol="0" anchor="ctr"/>
           <a:lstStyle/>
           <a:p>
             <a:pPr algn="ctr" indent="0" marL="0">
@@ -2922,9 +2850,7 @@
           <a:ln/>
         </p:spPr>
         <p:txBody>
-          <a:bodyPr wrap="square" rtlCol="0" anchor="ctr">
-            <a:normAutofit/>
-          </a:bodyPr>
+          <a:bodyPr wrap="square" rtlCol="0" anchor="ctr"/>
           <a:lstStyle/>
           <a:p>
             <a:pPr indent="0" marL="0">
@@ -2963,9 +2889,7 @@
           <a:ln/>
         </p:spPr>
         <p:txBody>
-          <a:bodyPr wrap="square" rtlCol="0" anchor="ctr">
-            <a:normAutofit/>
-          </a:bodyPr>
+          <a:bodyPr wrap="square" rtlCol="0" anchor="ctr"/>
           <a:lstStyle/>
           <a:p>
             <a:pPr indent="0" marL="0">
@@ -3013,9 +2937,7 @@
           </a:ln>
         </p:spPr>
         <p:txBody>
-          <a:bodyPr wrap="square">
-            <a:normAutofit/>
-          </a:bodyPr>
+          <a:bodyPr/>
           <a:p/>
         </p:txBody>
       </p:sp>
@@ -3046,9 +2968,7 @@
           </a:ln>
         </p:spPr>
         <p:txBody>
-          <a:bodyPr wrap="square">
-            <a:normAutofit/>
-          </a:bodyPr>
+          <a:bodyPr/>
           <a:p/>
         </p:txBody>
       </p:sp>
@@ -3070,9 +2990,7 @@
           <a:ln/>
         </p:spPr>
         <p:txBody>
-          <a:bodyPr wrap="square" rtlCol="0" anchor="ctr">
-            <a:normAutofit/>
-          </a:bodyPr>
+          <a:bodyPr wrap="square" rtlCol="0" anchor="ctr"/>
           <a:lstStyle/>
           <a:p>
             <a:pPr algn="ctr" indent="0" marL="0">
@@ -3111,9 +3029,7 @@
           <a:ln/>
         </p:spPr>
         <p:txBody>
-          <a:bodyPr wrap="square" rtlCol="0" anchor="ctr">
-            <a:normAutofit/>
-          </a:bodyPr>
+          <a:bodyPr wrap="square" rtlCol="0" anchor="ctr"/>
           <a:lstStyle/>
           <a:p>
             <a:pPr indent="0" marL="0">
@@ -3161,9 +3077,7 @@
           </a:ln>
         </p:spPr>
         <p:txBody>
-          <a:bodyPr wrap="square">
-            <a:normAutofit/>
-          </a:bodyPr>
+          <a:bodyPr/>
           <a:p/>
         </p:txBody>
       </p:sp>
@@ -3194,9 +3108,7 @@
           </a:ln>
         </p:spPr>
         <p:txBody>
-          <a:bodyPr wrap="square">
-            <a:normAutofit/>
-          </a:bodyPr>
+          <a:bodyPr/>
           <a:p/>
         </p:txBody>
       </p:sp>
@@ -3218,9 +3130,7 @@
           <a:ln/>
         </p:spPr>
         <p:txBody>
-          <a:bodyPr wrap="square" rtlCol="0" anchor="ctr">
-            <a:normAutofit/>
-          </a:bodyPr>
+          <a:bodyPr wrap="square" rtlCol="0" anchor="ctr"/>
           <a:lstStyle/>
           <a:p>
             <a:pPr algn="ctr" indent="0" marL="0">
@@ -3259,9 +3169,7 @@
           <a:ln/>
         </p:spPr>
         <p:txBody>
-          <a:bodyPr wrap="square" rtlCol="0" anchor="ctr">
-            <a:normAutofit/>
-          </a:bodyPr>
+          <a:bodyPr wrap="square" rtlCol="0" anchor="ctr"/>
           <a:lstStyle/>
           <a:p>
             <a:pPr indent="0" marL="0">
@@ -3309,9 +3217,7 @@
           </a:ln>
         </p:spPr>
         <p:txBody>
-          <a:bodyPr wrap="square">
-            <a:normAutofit/>
-          </a:bodyPr>
+          <a:bodyPr/>
           <a:p/>
         </p:txBody>
       </p:sp>
@@ -3342,9 +3248,7 @@
           </a:ln>
         </p:spPr>
         <p:txBody>
-          <a:bodyPr wrap="square">
-            <a:normAutofit/>
-          </a:bodyPr>
+          <a:bodyPr/>
           <a:p/>
         </p:txBody>
       </p:sp>
@@ -3366,9 +3270,7 @@
           <a:ln/>
         </p:spPr>
         <p:txBody>
-          <a:bodyPr wrap="square" rtlCol="0" anchor="ctr">
-            <a:normAutofit/>
-          </a:bodyPr>
+          <a:bodyPr wrap="square" rtlCol="0" anchor="ctr"/>
           <a:lstStyle/>
           <a:p>
             <a:pPr algn="ctr" indent="0" marL="0">
@@ -3407,9 +3309,7 @@
           <a:ln/>
         </p:spPr>
         <p:txBody>
-          <a:bodyPr wrap="square" rtlCol="0" anchor="ctr">
-            <a:normAutofit/>
-          </a:bodyPr>
+          <a:bodyPr wrap="square" rtlCol="0" anchor="ctr"/>
           <a:lstStyle/>
           <a:p>
             <a:pPr indent="0" marL="0">
@@ -3457,9 +3357,7 @@
           </a:ln>
         </p:spPr>
         <p:txBody>
-          <a:bodyPr wrap="square">
-            <a:normAutofit/>
-          </a:bodyPr>
+          <a:bodyPr/>
           <a:p/>
         </p:txBody>
       </p:sp>
@@ -3490,9 +3388,7 @@
           </a:ln>
         </p:spPr>
         <p:txBody>
-          <a:bodyPr wrap="square">
-            <a:normAutofit/>
-          </a:bodyPr>
+          <a:bodyPr/>
           <a:p/>
         </p:txBody>
       </p:sp>
@@ -3514,9 +3410,7 @@
           <a:ln/>
         </p:spPr>
         <p:txBody>
-          <a:bodyPr wrap="square" rtlCol="0" anchor="ctr">
-            <a:normAutofit/>
-          </a:bodyPr>
+          <a:bodyPr wrap="square" rtlCol="0" anchor="ctr"/>
           <a:lstStyle/>
           <a:p>
             <a:pPr algn="ctr" indent="0" marL="0">
@@ -3555,9 +3449,7 @@
           <a:ln/>
         </p:spPr>
         <p:txBody>
-          <a:bodyPr wrap="square" rtlCol="0" anchor="ctr">
-            <a:normAutofit/>
-          </a:bodyPr>
+          <a:bodyPr wrap="square" rtlCol="0" anchor="ctr"/>
           <a:lstStyle/>
           <a:p>
             <a:pPr indent="0" marL="0">
@@ -3605,9 +3497,7 @@
           </a:ln>
         </p:spPr>
         <p:txBody>
-          <a:bodyPr wrap="square">
-            <a:normAutofit/>
-          </a:bodyPr>
+          <a:bodyPr/>
           <a:p/>
         </p:txBody>
       </p:sp>
@@ -3638,9 +3528,7 @@
           </a:ln>
         </p:spPr>
         <p:txBody>
-          <a:bodyPr wrap="square">
-            <a:normAutofit/>
-          </a:bodyPr>
+          <a:bodyPr/>
           <a:p/>
         </p:txBody>
       </p:sp>
@@ -3662,9 +3550,7 @@
           <a:ln/>
         </p:spPr>
         <p:txBody>
-          <a:bodyPr wrap="square" rtlCol="0" anchor="ctr">
-            <a:normAutofit/>
-          </a:bodyPr>
+          <a:bodyPr wrap="square" rtlCol="0" anchor="ctr"/>
           <a:lstStyle/>
           <a:p>
             <a:pPr algn="ctr" indent="0" marL="0">
@@ -3703,9 +3589,7 @@
           <a:ln/>
         </p:spPr>
         <p:txBody>
-          <a:bodyPr wrap="square" rtlCol="0" anchor="ctr">
-            <a:normAutofit/>
-          </a:bodyPr>
+          <a:bodyPr wrap="square" rtlCol="0" anchor="ctr"/>
           <a:lstStyle/>
           <a:p>
             <a:pPr indent="0" marL="0">
@@ -3744,9 +3628,7 @@
           <a:ln/>
         </p:spPr>
         <p:txBody>
-          <a:bodyPr wrap="square" rtlCol="0" anchor="ctr">
-            <a:normAutofit/>
-          </a:bodyPr>
+          <a:bodyPr wrap="square" rtlCol="0" anchor="ctr"/>
           <a:lstStyle/>
           <a:p>
             <a:pPr algn="r" indent="0" marL="0">
@@ -3817,9 +3699,7 @@
           </a:ln>
         </p:spPr>
         <p:txBody>
-          <a:bodyPr wrap="square">
-            <a:normAutofit/>
-          </a:bodyPr>
+          <a:bodyPr/>
           <a:p/>
         </p:txBody>
       </p:sp>
@@ -3848,9 +3728,7 @@
           </a:ln>
         </p:spPr>
         <p:txBody>
-          <a:bodyPr wrap="square">
-            <a:normAutofit/>
-          </a:bodyPr>
+          <a:bodyPr/>
           <a:p/>
         </p:txBody>
       </p:sp>
@@ -3881,9 +3759,7 @@
           </a:ln>
         </p:spPr>
         <p:txBody>
-          <a:bodyPr wrap="square">
-            <a:normAutofit/>
-          </a:bodyPr>
+          <a:bodyPr/>
           <a:p/>
         </p:txBody>
       </p:sp>
@@ -3905,9 +3781,7 @@
           <a:ln/>
         </p:spPr>
         <p:txBody>
-          <a:bodyPr wrap="square" rtlCol="0" anchor="ctr">
-            <a:normAutofit/>
-          </a:bodyPr>
+          <a:bodyPr wrap="square" rtlCol="0" anchor="ctr"/>
           <a:lstStyle/>
           <a:p>
             <a:pPr algn="ctr" indent="0" marL="0">
@@ -3946,9 +3820,7 @@
           <a:ln/>
         </p:spPr>
         <p:txBody>
-          <a:bodyPr wrap="square" rtlCol="0" anchor="ctr">
-            <a:normAutofit/>
-          </a:bodyPr>
+          <a:bodyPr wrap="square" rtlCol="0" anchor="ctr"/>
           <a:lstStyle/>
           <a:p>
             <a:pPr indent="0" marL="0">
@@ -3987,9 +3859,7 @@
           <a:ln/>
         </p:spPr>
         <p:txBody>
-          <a:bodyPr wrap="square" rtlCol="0" anchor="ctr">
-            <a:normAutofit/>
-          </a:bodyPr>
+          <a:bodyPr wrap="square" rtlCol="0" anchor="ctr"/>
           <a:lstStyle/>
           <a:p>
             <a:pPr indent="0" marL="0">
@@ -4037,9 +3907,7 @@
           </a:ln>
         </p:spPr>
         <p:txBody>
-          <a:bodyPr wrap="square">
-            <a:normAutofit/>
-          </a:bodyPr>
+          <a:bodyPr/>
           <a:p/>
         </p:txBody>
       </p:sp>
@@ -4061,9 +3929,7 @@
           <a:ln/>
         </p:spPr>
         <p:txBody>
-          <a:bodyPr wrap="square" rtlCol="0" anchor="ctr">
-            <a:normAutofit/>
-          </a:bodyPr>
+          <a:bodyPr wrap="square" rtlCol="0" anchor="ctr"/>
           <a:lstStyle/>
           <a:p>
             <a:pPr indent="0" marL="0">
@@ -4102,9 +3968,7 @@
           <a:ln/>
         </p:spPr>
         <p:txBody>
-          <a:bodyPr wrap="square" rtlCol="0" anchor="t">
-            <a:normAutofit/>
-          </a:bodyPr>
+          <a:bodyPr wrap="square" rtlCol="0" anchor="t"/>
           <a:lstStyle/>
           <a:p>
             <a:pPr indent="0" marL="0">
@@ -4313,9 +4177,7 @@
           <a:ln/>
         </p:spPr>
         <p:txBody>
-          <a:bodyPr wrap="square" rtlCol="0" anchor="ctr">
-            <a:normAutofit/>
-          </a:bodyPr>
+          <a:bodyPr wrap="square" rtlCol="0" anchor="ctr"/>
           <a:lstStyle/>
           <a:p>
             <a:pPr algn="r" indent="0" marL="0">
@@ -4386,9 +4248,7 @@
           </a:ln>
         </p:spPr>
         <p:txBody>
-          <a:bodyPr wrap="square">
-            <a:normAutofit/>
-          </a:bodyPr>
+          <a:bodyPr/>
           <a:p/>
         </p:txBody>
       </p:sp>
@@ -4417,9 +4277,7 @@
           </a:ln>
         </p:spPr>
         <p:txBody>
-          <a:bodyPr wrap="square">
-            <a:normAutofit/>
-          </a:bodyPr>
+          <a:bodyPr/>
           <a:p/>
         </p:txBody>
       </p:sp>
@@ -4450,9 +4308,7 @@
           </a:ln>
         </p:spPr>
         <p:txBody>
-          <a:bodyPr wrap="square">
-            <a:normAutofit/>
-          </a:bodyPr>
+          <a:bodyPr/>
           <a:p/>
         </p:txBody>
       </p:sp>
@@ -4474,9 +4330,7 @@
           <a:ln/>
         </p:spPr>
         <p:txBody>
-          <a:bodyPr wrap="square" rtlCol="0" anchor="ctr">
-            <a:normAutofit/>
-          </a:bodyPr>
+          <a:bodyPr wrap="square" rtlCol="0" anchor="ctr"/>
           <a:lstStyle/>
           <a:p>
             <a:pPr algn="ctr" indent="0" marL="0">
@@ -4515,9 +4369,7 @@
           <a:ln/>
         </p:spPr>
         <p:txBody>
-          <a:bodyPr wrap="square" rtlCol="0" anchor="ctr">
-            <a:normAutofit/>
-          </a:bodyPr>
+          <a:bodyPr wrap="square" rtlCol="0" anchor="ctr"/>
           <a:lstStyle/>
           <a:p>
             <a:pPr indent="0" marL="0">
@@ -4556,9 +4408,7 @@
           <a:ln/>
         </p:spPr>
         <p:txBody>
-          <a:bodyPr wrap="square" rtlCol="0" anchor="ctr">
-            <a:normAutofit/>
-          </a:bodyPr>
+          <a:bodyPr wrap="square" rtlCol="0" anchor="ctr"/>
           <a:lstStyle/>
           <a:p>
             <a:pPr indent="0" marL="0">
@@ -4606,9 +4456,7 @@
           </a:ln>
         </p:spPr>
         <p:txBody>
-          <a:bodyPr wrap="square">
-            <a:normAutofit/>
-          </a:bodyPr>
+          <a:bodyPr/>
           <a:p/>
         </p:txBody>
       </p:sp>
@@ -4630,9 +4478,7 @@
           <a:ln/>
         </p:spPr>
         <p:txBody>
-          <a:bodyPr wrap="square" rtlCol="0" anchor="ctr">
-            <a:normAutofit/>
-          </a:bodyPr>
+          <a:bodyPr wrap="square" rtlCol="0" anchor="ctr"/>
           <a:lstStyle/>
           <a:p>
             <a:pPr indent="0" marL="0">
@@ -4671,9 +4517,7 @@
           <a:ln/>
         </p:spPr>
         <p:txBody>
-          <a:bodyPr wrap="square" rtlCol="0" anchor="ctr">
-            <a:normAutofit/>
-          </a:bodyPr>
+          <a:bodyPr wrap="square" rtlCol="0" anchor="ctr"/>
           <a:lstStyle/>
           <a:p>
             <a:pPr indent="0" marL="0">
@@ -4712,9 +4556,7 @@
           <a:ln/>
         </p:spPr>
         <p:txBody>
-          <a:bodyPr wrap="square" rtlCol="0" anchor="t">
-            <a:normAutofit/>
-          </a:bodyPr>
+          <a:bodyPr wrap="square" rtlCol="0" anchor="t"/>
           <a:lstStyle/>
           <a:p>
             <a:pPr indent="0" marL="0">
@@ -4753,9 +4595,7 @@
           <a:ln/>
         </p:spPr>
         <p:txBody>
-          <a:bodyPr wrap="square" rtlCol="0" anchor="ctr">
-            <a:normAutofit/>
-          </a:bodyPr>
+          <a:bodyPr wrap="square" rtlCol="0" anchor="ctr"/>
           <a:lstStyle/>
           <a:p>
             <a:pPr indent="0" marL="0">
@@ -4794,9 +4634,7 @@
           <a:ln/>
         </p:spPr>
         <p:txBody>
-          <a:bodyPr wrap="square" rtlCol="0" anchor="t">
-            <a:normAutofit/>
-          </a:bodyPr>
+          <a:bodyPr wrap="square" rtlCol="0" anchor="t"/>
           <a:lstStyle/>
           <a:p>
             <a:pPr indent="0" marL="0">
@@ -4835,9 +4673,7 @@
           <a:ln/>
         </p:spPr>
         <p:txBody>
-          <a:bodyPr wrap="square" rtlCol="0" anchor="ctr">
-            <a:normAutofit/>
-          </a:bodyPr>
+          <a:bodyPr wrap="square" rtlCol="0" anchor="ctr"/>
           <a:lstStyle/>
           <a:p>
             <a:pPr indent="0" marL="0">
@@ -4876,9 +4712,7 @@
           <a:ln/>
         </p:spPr>
         <p:txBody>
-          <a:bodyPr wrap="square" rtlCol="0" anchor="t">
-            <a:normAutofit/>
-          </a:bodyPr>
+          <a:bodyPr wrap="square" rtlCol="0" anchor="t"/>
           <a:lstStyle/>
           <a:p>
             <a:pPr indent="0" marL="0">
@@ -4926,9 +4760,7 @@
           </a:ln>
         </p:spPr>
         <p:txBody>
-          <a:bodyPr wrap="square">
-            <a:normAutofit/>
-          </a:bodyPr>
+          <a:bodyPr/>
           <a:p/>
         </p:txBody>
       </p:sp>
@@ -4950,9 +4782,7 @@
           <a:ln/>
         </p:spPr>
         <p:txBody>
-          <a:bodyPr wrap="square" rtlCol="0" anchor="ctr">
-            <a:normAutofit/>
-          </a:bodyPr>
+          <a:bodyPr wrap="square" rtlCol="0" anchor="ctr"/>
           <a:lstStyle/>
           <a:p>
             <a:pPr indent="0" marL="0">
@@ -4991,9 +4821,7 @@
           <a:ln/>
         </p:spPr>
         <p:txBody>
-          <a:bodyPr wrap="square" rtlCol="0" anchor="t">
-            <a:normAutofit/>
-          </a:bodyPr>
+          <a:bodyPr wrap="square" rtlCol="0" anchor="t"/>
           <a:lstStyle/>
           <a:p>
             <a:pPr indent="0" marL="0">
@@ -5032,9 +4860,7 @@
           <a:ln/>
         </p:spPr>
         <p:txBody>
-          <a:bodyPr wrap="square" rtlCol="0" anchor="t">
-            <a:normAutofit/>
-          </a:bodyPr>
+          <a:bodyPr wrap="square" rtlCol="0" anchor="t"/>
           <a:lstStyle/>
           <a:p>
             <a:pPr indent="0" marL="0">
@@ -5073,9 +4899,7 @@
           <a:ln/>
         </p:spPr>
         <p:txBody>
-          <a:bodyPr wrap="square" rtlCol="0" anchor="t">
-            <a:normAutofit/>
-          </a:bodyPr>
+          <a:bodyPr wrap="square" rtlCol="0" anchor="t"/>
           <a:lstStyle/>
           <a:p>
             <a:pPr indent="0" marL="0">
@@ -5114,9 +4938,7 @@
           <a:ln/>
         </p:spPr>
         <p:txBody>
-          <a:bodyPr wrap="square" rtlCol="0" anchor="ctr">
-            <a:normAutofit/>
-          </a:bodyPr>
+          <a:bodyPr wrap="square" rtlCol="0" anchor="ctr"/>
           <a:lstStyle/>
           <a:p>
             <a:pPr algn="r" indent="0" marL="0">
@@ -5187,9 +5009,7 @@
           </a:ln>
         </p:spPr>
         <p:txBody>
-          <a:bodyPr wrap="square">
-            <a:normAutofit/>
-          </a:bodyPr>
+          <a:bodyPr/>
           <a:p/>
         </p:txBody>
       </p:sp>
@@ -5218,9 +5038,7 @@
           </a:ln>
         </p:spPr>
         <p:txBody>
-          <a:bodyPr wrap="square">
-            <a:normAutofit/>
-          </a:bodyPr>
+          <a:bodyPr/>
           <a:p/>
         </p:txBody>
       </p:sp>
@@ -5251,9 +5069,7 @@
           </a:ln>
         </p:spPr>
         <p:txBody>
-          <a:bodyPr wrap="square">
-            <a:normAutofit/>
-          </a:bodyPr>
+          <a:bodyPr/>
           <a:p/>
         </p:txBody>
       </p:sp>
@@ -5275,9 +5091,7 @@
           <a:ln/>
         </p:spPr>
         <p:txBody>
-          <a:bodyPr wrap="square" rtlCol="0" anchor="ctr">
-            <a:normAutofit/>
-          </a:bodyPr>
+          <a:bodyPr wrap="square" rtlCol="0" anchor="ctr"/>
           <a:lstStyle/>
           <a:p>
             <a:pPr algn="ctr" indent="0" marL="0">
@@ -5316,9 +5130,7 @@
           <a:ln/>
         </p:spPr>
         <p:txBody>
-          <a:bodyPr wrap="square" rtlCol="0" anchor="ctr">
-            <a:normAutofit/>
-          </a:bodyPr>
+          <a:bodyPr wrap="square" rtlCol="0" anchor="ctr"/>
           <a:lstStyle/>
           <a:p>
             <a:pPr indent="0" marL="0">
@@ -5357,9 +5169,7 @@
           <a:ln/>
         </p:spPr>
         <p:txBody>
-          <a:bodyPr wrap="square" rtlCol="0" anchor="ctr">
-            <a:normAutofit/>
-          </a:bodyPr>
+          <a:bodyPr wrap="square" rtlCol="0" anchor="ctr"/>
           <a:lstStyle/>
           <a:p>
             <a:pPr indent="0" marL="0">
@@ -5407,9 +5217,7 @@
           </a:ln>
         </p:spPr>
         <p:txBody>
-          <a:bodyPr wrap="square">
-            <a:normAutofit/>
-          </a:bodyPr>
+          <a:bodyPr/>
           <a:p/>
         </p:txBody>
       </p:sp>
@@ -5431,9 +5239,7 @@
           <a:ln/>
         </p:spPr>
         <p:txBody>
-          <a:bodyPr wrap="square" rtlCol="0" anchor="ctr">
-            <a:normAutofit/>
-          </a:bodyPr>
+          <a:bodyPr wrap="square" rtlCol="0" anchor="ctr"/>
           <a:lstStyle/>
           <a:p>
             <a:pPr indent="0" marL="0">
@@ -5472,9 +5278,7 @@
           <a:ln/>
         </p:spPr>
         <p:txBody>
-          <a:bodyPr wrap="square" rtlCol="0" anchor="t">
-            <a:normAutofit/>
-          </a:bodyPr>
+          <a:bodyPr wrap="square" rtlCol="0" anchor="t"/>
           <a:lstStyle/>
           <a:p>
             <a:pPr indent="0" marL="0">
@@ -5836,9 +5640,7 @@
           <a:ln/>
         </p:spPr>
         <p:txBody>
-          <a:bodyPr wrap="square" rtlCol="0" anchor="ctr">
-            <a:normAutofit/>
-          </a:bodyPr>
+          <a:bodyPr wrap="square" rtlCol="0" anchor="ctr"/>
           <a:lstStyle/>
           <a:p>
             <a:pPr algn="r" indent="0" marL="0">
@@ -5909,9 +5711,7 @@
           </a:ln>
         </p:spPr>
         <p:txBody>
-          <a:bodyPr wrap="square">
-            <a:normAutofit/>
-          </a:bodyPr>
+          <a:bodyPr/>
           <a:p/>
         </p:txBody>
       </p:sp>
@@ -5940,9 +5740,7 @@
           </a:ln>
         </p:spPr>
         <p:txBody>
-          <a:bodyPr wrap="square">
-            <a:normAutofit/>
-          </a:bodyPr>
+          <a:bodyPr/>
           <a:p/>
         </p:txBody>
       </p:sp>
@@ -5973,9 +5771,7 @@
           </a:ln>
         </p:spPr>
         <p:txBody>
-          <a:bodyPr wrap="square">
-            <a:normAutofit/>
-          </a:bodyPr>
+          <a:bodyPr/>
           <a:p/>
         </p:txBody>
       </p:sp>
@@ -5997,9 +5793,7 @@
           <a:ln/>
         </p:spPr>
         <p:txBody>
-          <a:bodyPr wrap="square" rtlCol="0" anchor="ctr">
-            <a:normAutofit/>
-          </a:bodyPr>
+          <a:bodyPr wrap="square" rtlCol="0" anchor="ctr"/>
           <a:lstStyle/>
           <a:p>
             <a:pPr algn="ctr" indent="0" marL="0">
@@ -6038,9 +5832,7 @@
           <a:ln/>
         </p:spPr>
         <p:txBody>
-          <a:bodyPr wrap="square" rtlCol="0" anchor="ctr">
-            <a:normAutofit/>
-          </a:bodyPr>
+          <a:bodyPr wrap="square" rtlCol="0" anchor="ctr"/>
           <a:lstStyle/>
           <a:p>
             <a:pPr indent="0" marL="0">
@@ -6079,9 +5871,7 @@
           <a:ln/>
         </p:spPr>
         <p:txBody>
-          <a:bodyPr wrap="square" rtlCol="0" anchor="ctr">
-            <a:normAutofit/>
-          </a:bodyPr>
+          <a:bodyPr wrap="square" rtlCol="0" anchor="ctr"/>
           <a:lstStyle/>
           <a:p>
             <a:pPr indent="0" marL="0">
@@ -6129,9 +5919,7 @@
           </a:ln>
         </p:spPr>
         <p:txBody>
-          <a:bodyPr wrap="square">
-            <a:normAutofit/>
-          </a:bodyPr>
+          <a:bodyPr/>
           <a:p/>
         </p:txBody>
       </p:sp>
@@ -6153,9 +5941,7 @@
           <a:ln/>
         </p:spPr>
         <p:txBody>
-          <a:bodyPr wrap="square" rtlCol="0" anchor="ctr">
-            <a:normAutofit/>
-          </a:bodyPr>
+          <a:bodyPr wrap="square" rtlCol="0" anchor="ctr"/>
           <a:lstStyle/>
           <a:p>
             <a:pPr indent="0" marL="0">
@@ -6194,9 +5980,7 @@
           <a:ln/>
         </p:spPr>
         <p:txBody>
-          <a:bodyPr wrap="square" rtlCol="0" anchor="ctr">
-            <a:normAutofit/>
-          </a:bodyPr>
+          <a:bodyPr wrap="square" rtlCol="0" anchor="ctr"/>
           <a:lstStyle/>
           <a:p>
             <a:pPr indent="0" marL="0">
@@ -6235,9 +6019,7 @@
           <a:ln/>
         </p:spPr>
         <p:txBody>
-          <a:bodyPr wrap="square" rtlCol="0" anchor="t">
-            <a:normAutofit/>
-          </a:bodyPr>
+          <a:bodyPr wrap="square" rtlCol="0" anchor="t"/>
           <a:lstStyle/>
           <a:p>
             <a:pPr indent="0" marL="0">
@@ -6276,9 +6058,7 @@
           <a:ln/>
         </p:spPr>
         <p:txBody>
-          <a:bodyPr wrap="square" rtlCol="0" anchor="ctr">
-            <a:normAutofit/>
-          </a:bodyPr>
+          <a:bodyPr wrap="square" rtlCol="0" anchor="ctr"/>
           <a:lstStyle/>
           <a:p>
             <a:pPr indent="0" marL="0">
@@ -6317,9 +6097,7 @@
           <a:ln/>
         </p:spPr>
         <p:txBody>
-          <a:bodyPr wrap="square" rtlCol="0" anchor="t">
-            <a:normAutofit/>
-          </a:bodyPr>
+          <a:bodyPr wrap="square" rtlCol="0" anchor="t"/>
           <a:lstStyle/>
           <a:p>
             <a:pPr indent="0" marL="0">
@@ -6358,9 +6136,7 @@
           <a:ln/>
         </p:spPr>
         <p:txBody>
-          <a:bodyPr wrap="square" rtlCol="0" anchor="ctr">
-            <a:normAutofit/>
-          </a:bodyPr>
+          <a:bodyPr wrap="square" rtlCol="0" anchor="ctr"/>
           <a:lstStyle/>
           <a:p>
             <a:pPr indent="0" marL="0">
@@ -6399,9 +6175,7 @@
           <a:ln/>
         </p:spPr>
         <p:txBody>
-          <a:bodyPr wrap="square" rtlCol="0" anchor="t">
-            <a:normAutofit/>
-          </a:bodyPr>
+          <a:bodyPr wrap="square" rtlCol="0" anchor="t"/>
           <a:lstStyle/>
           <a:p>
             <a:pPr indent="0" marL="0">
@@ -6449,9 +6223,7 @@
           </a:ln>
         </p:spPr>
         <p:txBody>
-          <a:bodyPr wrap="square">
-            <a:normAutofit/>
-          </a:bodyPr>
+          <a:bodyPr/>
           <a:p/>
         </p:txBody>
       </p:sp>
@@ -6473,9 +6245,7 @@
           <a:ln/>
         </p:spPr>
         <p:txBody>
-          <a:bodyPr wrap="square" rtlCol="0" anchor="ctr">
-            <a:normAutofit/>
-          </a:bodyPr>
+          <a:bodyPr wrap="square" rtlCol="0" anchor="ctr"/>
           <a:lstStyle/>
           <a:p>
             <a:pPr indent="0" marL="0">
@@ -6514,9 +6284,7 @@
           <a:ln/>
         </p:spPr>
         <p:txBody>
-          <a:bodyPr wrap="square" rtlCol="0" anchor="t">
-            <a:normAutofit/>
-          </a:bodyPr>
+          <a:bodyPr wrap="square" rtlCol="0" anchor="t"/>
           <a:lstStyle/>
           <a:p>
             <a:pPr indent="0" marL="0">
@@ -6555,9 +6323,7 @@
           <a:ln/>
         </p:spPr>
         <p:txBody>
-          <a:bodyPr wrap="square" rtlCol="0" anchor="t">
-            <a:normAutofit/>
-          </a:bodyPr>
+          <a:bodyPr wrap="square" rtlCol="0" anchor="t"/>
           <a:lstStyle/>
           <a:p>
             <a:pPr indent="0" marL="0">
@@ -6596,9 +6362,7 @@
           <a:ln/>
         </p:spPr>
         <p:txBody>
-          <a:bodyPr wrap="square" rtlCol="0" anchor="t">
-            <a:normAutofit/>
-          </a:bodyPr>
+          <a:bodyPr wrap="square" rtlCol="0" anchor="t"/>
           <a:lstStyle/>
           <a:p>
             <a:pPr indent="0" marL="0">
@@ -6637,9 +6401,7 @@
           <a:ln/>
         </p:spPr>
         <p:txBody>
-          <a:bodyPr wrap="square" rtlCol="0" anchor="ctr">
-            <a:normAutofit/>
-          </a:bodyPr>
+          <a:bodyPr wrap="square" rtlCol="0" anchor="ctr"/>
           <a:lstStyle/>
           <a:p>
             <a:pPr algn="r" indent="0" marL="0">
@@ -6710,9 +6472,7 @@
           </a:ln>
         </p:spPr>
         <p:txBody>
-          <a:bodyPr wrap="square">
-            <a:normAutofit/>
-          </a:bodyPr>
+          <a:bodyPr/>
           <a:p/>
         </p:txBody>
       </p:sp>
@@ -6741,9 +6501,7 @@
           </a:ln>
         </p:spPr>
         <p:txBody>
-          <a:bodyPr wrap="square">
-            <a:normAutofit/>
-          </a:bodyPr>
+          <a:bodyPr/>
           <a:p/>
         </p:txBody>
       </p:sp>
@@ -6774,9 +6532,7 @@
           </a:ln>
         </p:spPr>
         <p:txBody>
-          <a:bodyPr wrap="square">
-            <a:normAutofit/>
-          </a:bodyPr>
+          <a:bodyPr/>
           <a:p/>
         </p:txBody>
       </p:sp>
@@ -6798,9 +6554,7 @@
           <a:ln/>
         </p:spPr>
         <p:txBody>
-          <a:bodyPr wrap="square" rtlCol="0" anchor="ctr">
-            <a:normAutofit/>
-          </a:bodyPr>
+          <a:bodyPr wrap="square" rtlCol="0" anchor="ctr"/>
           <a:lstStyle/>
           <a:p>
             <a:pPr algn="ctr" indent="0" marL="0">
@@ -6839,9 +6593,7 @@
           <a:ln/>
         </p:spPr>
         <p:txBody>
-          <a:bodyPr wrap="square" rtlCol="0" anchor="ctr">
-            <a:normAutofit/>
-          </a:bodyPr>
+          <a:bodyPr wrap="square" rtlCol="0" anchor="ctr"/>
           <a:lstStyle/>
           <a:p>
             <a:pPr indent="0" marL="0">
@@ -6880,9 +6632,7 @@
           <a:ln/>
         </p:spPr>
         <p:txBody>
-          <a:bodyPr wrap="square" rtlCol="0" anchor="ctr">
-            <a:normAutofit/>
-          </a:bodyPr>
+          <a:bodyPr wrap="square" rtlCol="0" anchor="ctr"/>
           <a:lstStyle/>
           <a:p>
             <a:pPr indent="0" marL="0">
@@ -6930,9 +6680,7 @@
           </a:ln>
         </p:spPr>
         <p:txBody>
-          <a:bodyPr wrap="square">
-            <a:normAutofit/>
-          </a:bodyPr>
+          <a:bodyPr/>
           <a:p/>
         </p:txBody>
       </p:sp>
@@ -6954,9 +6702,7 @@
           <a:ln/>
         </p:spPr>
         <p:txBody>
-          <a:bodyPr wrap="square" rtlCol="0" anchor="ctr">
-            <a:normAutofit/>
-          </a:bodyPr>
+          <a:bodyPr wrap="square" rtlCol="0" anchor="ctr"/>
           <a:lstStyle/>
           <a:p>
             <a:pPr indent="0" marL="0">
@@ -6995,9 +6741,7 @@
           <a:ln/>
         </p:spPr>
         <p:txBody>
-          <a:bodyPr wrap="square" rtlCol="0" anchor="ctr">
-            <a:normAutofit/>
-          </a:bodyPr>
+          <a:bodyPr wrap="square" rtlCol="0" anchor="ctr"/>
           <a:lstStyle/>
           <a:p>
             <a:pPr indent="0" marL="0">
@@ -7036,9 +6780,7 @@
           <a:ln/>
         </p:spPr>
         <p:txBody>
-          <a:bodyPr wrap="square" rtlCol="0" anchor="t">
-            <a:normAutofit/>
-          </a:bodyPr>
+          <a:bodyPr wrap="square" rtlCol="0" anchor="t"/>
           <a:lstStyle/>
           <a:p>
             <a:pPr indent="0" marL="0">
@@ -7077,9 +6819,7 @@
           <a:ln/>
         </p:spPr>
         <p:txBody>
-          <a:bodyPr wrap="square" rtlCol="0" anchor="ctr">
-            <a:normAutofit/>
-          </a:bodyPr>
+          <a:bodyPr wrap="square" rtlCol="0" anchor="ctr"/>
           <a:lstStyle/>
           <a:p>
             <a:pPr indent="0" marL="0">
@@ -7118,9 +6858,7 @@
           <a:ln/>
         </p:spPr>
         <p:txBody>
-          <a:bodyPr wrap="square" rtlCol="0" anchor="t">
-            <a:normAutofit/>
-          </a:bodyPr>
+          <a:bodyPr wrap="square" rtlCol="0" anchor="t"/>
           <a:lstStyle/>
           <a:p>
             <a:pPr indent="0" marL="0">
@@ -7159,9 +6897,7 @@
           <a:ln/>
         </p:spPr>
         <p:txBody>
-          <a:bodyPr wrap="square" rtlCol="0" anchor="ctr">
-            <a:normAutofit/>
-          </a:bodyPr>
+          <a:bodyPr wrap="square" rtlCol="0" anchor="ctr"/>
           <a:lstStyle/>
           <a:p>
             <a:pPr indent="0" marL="0">
@@ -7200,9 +6936,7 @@
           <a:ln/>
         </p:spPr>
         <p:txBody>
-          <a:bodyPr wrap="square" rtlCol="0" anchor="t">
-            <a:normAutofit/>
-          </a:bodyPr>
+          <a:bodyPr wrap="square" rtlCol="0" anchor="t"/>
           <a:lstStyle/>
           <a:p>
             <a:pPr indent="0" marL="0">
@@ -7250,9 +6984,7 @@
           </a:ln>
         </p:spPr>
         <p:txBody>
-          <a:bodyPr wrap="square">
-            <a:normAutofit/>
-          </a:bodyPr>
+          <a:bodyPr/>
           <a:p/>
         </p:txBody>
       </p:sp>
@@ -7274,9 +7006,7 @@
           <a:ln/>
         </p:spPr>
         <p:txBody>
-          <a:bodyPr wrap="square" rtlCol="0" anchor="ctr">
-            <a:normAutofit/>
-          </a:bodyPr>
+          <a:bodyPr wrap="square" rtlCol="0" anchor="ctr"/>
           <a:lstStyle/>
           <a:p>
             <a:pPr indent="0" marL="0">
@@ -7315,9 +7045,7 @@
           <a:ln/>
         </p:spPr>
         <p:txBody>
-          <a:bodyPr wrap="square" rtlCol="0" anchor="t">
-            <a:normAutofit/>
-          </a:bodyPr>
+          <a:bodyPr wrap="square" rtlCol="0" anchor="t"/>
           <a:lstStyle/>
           <a:p>
             <a:pPr indent="0" marL="0">
@@ -7356,9 +7084,7 @@
           <a:ln/>
         </p:spPr>
         <p:txBody>
-          <a:bodyPr wrap="square" rtlCol="0" anchor="t">
-            <a:normAutofit/>
-          </a:bodyPr>
+          <a:bodyPr wrap="square" rtlCol="0" anchor="t"/>
           <a:lstStyle/>
           <a:p>
             <a:pPr indent="0" marL="0">
@@ -7397,9 +7123,7 @@
           <a:ln/>
         </p:spPr>
         <p:txBody>
-          <a:bodyPr wrap="square" rtlCol="0" anchor="t">
-            <a:normAutofit/>
-          </a:bodyPr>
+          <a:bodyPr wrap="square" rtlCol="0" anchor="t"/>
           <a:lstStyle/>
           <a:p>
             <a:pPr indent="0" marL="0">
@@ -7438,9 +7162,7 @@
           <a:ln/>
         </p:spPr>
         <p:txBody>
-          <a:bodyPr wrap="square" rtlCol="0" anchor="ctr">
-            <a:normAutofit/>
-          </a:bodyPr>
+          <a:bodyPr wrap="square" rtlCol="0" anchor="ctr"/>
           <a:lstStyle/>
           <a:p>
             <a:pPr algn="r" indent="0" marL="0">
